--- a/数字化安全监督员_宣传.pptx
+++ b/数字化安全监督员_宣传.pptx
@@ -4,9 +4,6 @@
   <p:sldMasterIdLst>
     <p:sldMasterId id="2147483648" r:id="rId1"/>
   </p:sldMasterIdLst>
-  <p:notesMasterIdLst>
-    <p:notesMasterId r:id="rId12"/>
-  </p:notesMasterIdLst>
   <p:sldIdLst>
     <p:sldId id="256" r:id="rId2"/>
     <p:sldId id="257" r:id="rId3"/>
@@ -19,7 +16,10 @@
     <p:sldId id="264" r:id="rId10"/>
     <p:sldId id="265" r:id="rId11"/>
   </p:sldIdLst>
-  <p:sldSz cx="9144000" cy="5143500" type="screen16x9"/>
+  <p:notesMasterIdLst>
+    <p:notesMasterId r:id="rId12"/>
+  </p:notesMasterIdLst>
+  <p:sldSz cx="9144000" cy="5143500"/>
   <p:notesSz cx="5143500" cy="9144000"/>
   <p:defaultTextStyle>
     <a:lvl1pPr marL="0" algn="l" defTabSz="914400" rtl="0" eaLnBrk="1" latinLnBrk="0" hangingPunct="1">
@@ -113,11 +113,9 @@
       </a:defRPr>
     </a:lvl9pPr>
   </p:defaultTextStyle>
-  <p:extLst>
-    <p:ext uri="{EFAFB233-063F-42B5-8137-9DF3F51BA10A}">
-      <p15:sldGuideLst xmlns:p15="http://schemas.microsoft.com/office/powerpoint/2012/main"/>
-    </p:ext>
-  </p:extLst>
+  <p:showPr loop="0" showNarration="0" showAnimation="1" useTimings="1">
+    <p:present/>
+  </p:showPr>
 </p:presentation>
 </file>
 
@@ -143,10 +141,234 @@
           <a:chExt cx="0" cy="0"/>
         </a:xfrm>
       </p:grpSpPr>
+      <p:sp>
+        <p:nvSpPr>
+          <p:cNvPr id="2" name="Header Placeholder 1"/>
+          <p:cNvSpPr>
+            <a:spLocks noGrp="1"/>
+          </p:cNvSpPr>
+          <p:nvPr>
+            <p:ph type="hdr" sz="quarter"/>
+          </p:nvPr>
+        </p:nvSpPr>
+        <p:spPr>
+          <a:xfrm>
+            <a:off x="0" y="0"/>
+            <a:ext cx="2971800" cy="458788"/>
+          </a:xfrm>
+          <a:prstGeom prst="rect">
+            <a:avLst/>
+          </a:prstGeom>
+        </p:spPr>
+        <p:txBody>
+          <a:bodyPr vert="horz" lIns="91440" tIns="45720" rIns="91440" bIns="45720" rtlCol="0"/>
+          <a:lstStyle>
+            <a:lvl1pPr algn="l">
+              <a:defRPr sz="1200"/>
+            </a:lvl1pPr>
+          </a:lstStyle>
+          <a:p>
+            <a:endParaRPr lang="en-US"/>
+          </a:p>
+        </p:txBody>
+      </p:sp>
+      <p:sp>
+        <p:nvSpPr>
+          <p:cNvPr id="3" name="Date Placeholder 2"/>
+          <p:cNvSpPr>
+            <a:spLocks noGrp="1"/>
+          </p:cNvSpPr>
+          <p:nvPr>
+            <p:ph type="dt" idx="1"/>
+          </p:nvPr>
+        </p:nvSpPr>
+        <p:spPr>
+          <a:xfrm>
+            <a:off x="3884613" y="0"/>
+            <a:ext cx="2971800" cy="458788"/>
+          </a:xfrm>
+          <a:prstGeom prst="rect">
+            <a:avLst/>
+          </a:prstGeom>
+        </p:spPr>
+        <p:txBody>
+          <a:bodyPr vert="horz" lIns="91440" tIns="45720" rIns="91440" bIns="45720" rtlCol="0"/>
+          <a:lstStyle>
+            <a:lvl1pPr algn="r">
+              <a:defRPr sz="1200"/>
+            </a:lvl1pPr>
+          </a:lstStyle>
+          <a:p>
+            <a:fld id="{5282F153-3F37-0F45-9E97-73ACFA13230C}" type="datetimeFigureOut">
+              <a:rPr lang="en-US"/>
+              <a:t>7/23/19</a:t>
+            </a:fld>
+            <a:endParaRPr lang="en-US"/>
+          </a:p>
+        </p:txBody>
+      </p:sp>
+      <p:sp>
+        <p:nvSpPr>
+          <p:cNvPr id="4" name="Slide Image Placeholder 3"/>
+          <p:cNvSpPr>
+            <a:spLocks noGrp="1" noRot="1" noChangeAspect="1"/>
+          </p:cNvSpPr>
+          <p:nvPr>
+            <p:ph type="sldImg" idx="2"/>
+          </p:nvPr>
+        </p:nvSpPr>
+        <p:spPr>
+          <a:xfrm>
+            <a:off x="685800" y="1143000"/>
+            <a:ext cx="5486400" cy="3086100"/>
+          </a:xfrm>
+          <a:prstGeom prst="rect">
+            <a:avLst/>
+          </a:prstGeom>
+          <a:noFill/>
+          <a:ln w="12700">
+            <a:solidFill>
+              <a:prstClr val="black"/>
+            </a:solidFill>
+          </a:ln>
+        </p:spPr>
+        <p:txBody>
+          <a:bodyPr vert="horz" lIns="91440" tIns="45720" rIns="91440" bIns="45720" rtlCol="0" anchor="ctr"/>
+          <a:lstStyle/>
+          <a:p>
+            <a:endParaRPr lang="en-US"/>
+          </a:p>
+        </p:txBody>
+      </p:sp>
+      <p:sp>
+        <p:nvSpPr>
+          <p:cNvPr id="5" name="Notes Placeholder 4"/>
+          <p:cNvSpPr>
+            <a:spLocks noGrp="1"/>
+          </p:cNvSpPr>
+          <p:nvPr>
+            <p:ph type="body" sz="quarter" idx="3"/>
+          </p:nvPr>
+        </p:nvSpPr>
+        <p:spPr>
+          <a:xfrm>
+            <a:off x="685800" y="4400550"/>
+            <a:ext cx="5486400" cy="3600450"/>
+          </a:xfrm>
+          <a:prstGeom prst="rect">
+            <a:avLst/>
+          </a:prstGeom>
+        </p:spPr>
+        <p:txBody>
+          <a:bodyPr vert="horz" lIns="91440" tIns="45720" rIns="91440" bIns="45720" rtlCol="0"/>
+          <a:lstStyle/>
+          <a:p>
+            <a:pPr lvl="0"/>
+            <a:r>
+              <a:rPr lang="en-US"/>
+              <a:t>Click to edit Master text styles</a:t>
+            </a:r>
+          </a:p>
+          <a:p>
+            <a:pPr lvl="1"/>
+            <a:r>
+              <a:rPr lang="en-US"/>
+              <a:t>Second level</a:t>
+            </a:r>
+          </a:p>
+          <a:p>
+            <a:pPr lvl="2"/>
+            <a:r>
+              <a:rPr lang="en-US"/>
+              <a:t>Third level</a:t>
+            </a:r>
+          </a:p>
+          <a:p>
+            <a:pPr lvl="3"/>
+            <a:r>
+              <a:rPr lang="en-US"/>
+              <a:t>Fourth level</a:t>
+            </a:r>
+          </a:p>
+          <a:p>
+            <a:pPr lvl="4"/>
+            <a:r>
+              <a:rPr lang="en-US"/>
+              <a:t>Fifth level</a:t>
+            </a:r>
+          </a:p>
+        </p:txBody>
+      </p:sp>
+      <p:sp>
+        <p:nvSpPr>
+          <p:cNvPr id="6" name="Footer Placeholder 5"/>
+          <p:cNvSpPr>
+            <a:spLocks noGrp="1"/>
+          </p:cNvSpPr>
+          <p:nvPr>
+            <p:ph type="ftr" sz="quarter" idx="4"/>
+          </p:nvPr>
+        </p:nvSpPr>
+        <p:spPr>
+          <a:xfrm>
+            <a:off x="0" y="8685213"/>
+            <a:ext cx="2971800" cy="458787"/>
+          </a:xfrm>
+          <a:prstGeom prst="rect">
+            <a:avLst/>
+          </a:prstGeom>
+        </p:spPr>
+        <p:txBody>
+          <a:bodyPr vert="horz" lIns="91440" tIns="45720" rIns="91440" bIns="45720" rtlCol="0" anchor="b"/>
+          <a:lstStyle>
+            <a:lvl1pPr algn="l">
+              <a:defRPr sz="1200"/>
+            </a:lvl1pPr>
+          </a:lstStyle>
+          <a:p>
+            <a:endParaRPr lang="en-US"/>
+          </a:p>
+        </p:txBody>
+      </p:sp>
+      <p:sp>
+        <p:nvSpPr>
+          <p:cNvPr id="7" name="Slide Number Placeholder 6"/>
+          <p:cNvSpPr>
+            <a:spLocks noGrp="1"/>
+          </p:cNvSpPr>
+          <p:nvPr>
+            <p:ph type="sldNum" sz="quarter" idx="5"/>
+          </p:nvPr>
+        </p:nvSpPr>
+        <p:spPr>
+          <a:xfrm>
+            <a:off x="3884613" y="8685213"/>
+            <a:ext cx="2971800" cy="458787"/>
+          </a:xfrm>
+          <a:prstGeom prst="rect">
+            <a:avLst/>
+          </a:prstGeom>
+        </p:spPr>
+        <p:txBody>
+          <a:bodyPr vert="horz" lIns="91440" tIns="45720" rIns="91440" bIns="45720" rtlCol="0" anchor="b"/>
+          <a:lstStyle>
+            <a:lvl1pPr algn="r">
+              <a:defRPr sz="1200"/>
+            </a:lvl1pPr>
+          </a:lstStyle>
+          <a:p>
+            <a:fld id="{CE5E9CC1-C706-0F49-92D6-E571CC5EEA8F}" type="slidenum">
+              <a:rPr lang="en-US"/>
+              <a:t>‹#›</a:t>
+            </a:fld>
+            <a:endParaRPr lang="en-US"/>
+          </a:p>
+        </p:txBody>
+      </p:sp>
     </p:spTree>
     <p:extLst>
       <p:ext uri="{BB962C8B-B14F-4D97-AF65-F5344CB8AC3E}">
-        <p14:creationId xmlns:p14="http://schemas.microsoft.com/office/powerpoint/2010/main" val="822045472"/>
+        <p14:creationId xmlns:p14="http://schemas.microsoft.com/office/powerpoint/2010/main" val="1024086991"/>
       </p:ext>
     </p:extLst>
   </p:cSld>
@@ -290,6 +512,10 @@
           <a:bodyPr/>
           <a:lstStyle/>
           <a:p>
+            <a:r>
+              <a:rPr lang="en-US" dirty="0"/>
+              <a:t/>
+            </a:r>
             <a:endParaRPr lang="en-US" dirty="0"/>
           </a:p>
         </p:txBody>
@@ -374,6 +600,10 @@
           <a:bodyPr/>
           <a:lstStyle/>
           <a:p>
+            <a:r>
+              <a:rPr lang="en-US" dirty="0"/>
+              <a:t/>
+            </a:r>
             <a:endParaRPr lang="en-US" dirty="0"/>
           </a:p>
         </p:txBody>
@@ -458,6 +688,10 @@
           <a:bodyPr/>
           <a:lstStyle/>
           <a:p>
+            <a:r>
+              <a:rPr lang="en-US" dirty="0"/>
+              <a:t/>
+            </a:r>
             <a:endParaRPr lang="en-US" dirty="0"/>
           </a:p>
         </p:txBody>
@@ -542,6 +776,10 @@
           <a:bodyPr/>
           <a:lstStyle/>
           <a:p>
+            <a:r>
+              <a:rPr lang="en-US" dirty="0"/>
+              <a:t/>
+            </a:r>
             <a:endParaRPr lang="en-US" dirty="0"/>
           </a:p>
         </p:txBody>
@@ -626,6 +864,10 @@
           <a:bodyPr/>
           <a:lstStyle/>
           <a:p>
+            <a:r>
+              <a:rPr lang="en-US" dirty="0"/>
+              <a:t/>
+            </a:r>
             <a:endParaRPr lang="en-US" dirty="0"/>
           </a:p>
         </p:txBody>
@@ -710,6 +952,10 @@
           <a:bodyPr/>
           <a:lstStyle/>
           <a:p>
+            <a:r>
+              <a:rPr lang="en-US" dirty="0"/>
+              <a:t/>
+            </a:r>
             <a:endParaRPr lang="en-US" dirty="0"/>
           </a:p>
         </p:txBody>
@@ -794,6 +1040,10 @@
           <a:bodyPr/>
           <a:lstStyle/>
           <a:p>
+            <a:r>
+              <a:rPr lang="en-US" dirty="0"/>
+              <a:t/>
+            </a:r>
             <a:endParaRPr lang="en-US" dirty="0"/>
           </a:p>
         </p:txBody>
@@ -878,6 +1128,10 @@
           <a:bodyPr/>
           <a:lstStyle/>
           <a:p>
+            <a:r>
+              <a:rPr lang="en-US" dirty="0"/>
+              <a:t/>
+            </a:r>
             <a:endParaRPr lang="en-US" dirty="0"/>
           </a:p>
         </p:txBody>
@@ -962,6 +1216,10 @@
           <a:bodyPr/>
           <a:lstStyle/>
           <a:p>
+            <a:r>
+              <a:rPr lang="en-US" dirty="0"/>
+              <a:t/>
+            </a:r>
             <a:endParaRPr lang="en-US" dirty="0"/>
           </a:p>
         </p:txBody>
@@ -1046,6 +1304,10 @@
           <a:bodyPr/>
           <a:lstStyle/>
           <a:p>
+            <a:r>
+              <a:rPr lang="en-US" dirty="0"/>
+              <a:t/>
+            </a:r>
             <a:endParaRPr lang="en-US" dirty="0"/>
           </a:p>
         </p:txBody>
@@ -1119,11 +1381,6 @@
 <file path=ppt/slideMasters/slideMaster1.xml><?xml version="1.0" encoding="utf-8"?>
 <p:sldMaster xmlns:a="http://schemas.openxmlformats.org/drawingml/2006/main" xmlns:r="http://schemas.openxmlformats.org/officeDocument/2006/relationships" xmlns:p="http://schemas.openxmlformats.org/presentationml/2006/main">
   <p:cSld>
-    <p:bg>
-      <p:bgRef idx="1001">
-        <a:schemeClr val="bg1"/>
-      </p:bgRef>
-    </p:bg>
     <p:spTree>
       <p:nvGrpSpPr>
         <p:cNvPr id="1" name=""/>
@@ -1406,7 +1663,6 @@
         <a:solidFill>
           <a:srgbClr val="F5F5F7"/>
         </a:solidFill>
-        <a:effectLst/>
       </p:bgPr>
     </p:bg>
     <p:spTree>
@@ -1447,13 +1703,6 @@
             <a:prstDash val="solid"/>
           </a:ln>
         </p:spPr>
-        <p:txBody>
-          <a:bodyPr/>
-          <a:lstStyle/>
-          <a:p>
-            <a:endParaRPr lang="zh-CN" altLang="en-US"/>
-          </a:p>
-        </p:txBody>
       </p:sp>
       <p:sp>
         <p:nvSpPr>
@@ -1479,13 +1728,6 @@
             <a:prstDash val="solid"/>
           </a:ln>
         </p:spPr>
-        <p:txBody>
-          <a:bodyPr/>
-          <a:lstStyle/>
-          <a:p>
-            <a:endParaRPr lang="zh-CN" altLang="en-US"/>
-          </a:p>
-        </p:txBody>
       </p:sp>
       <p:sp>
         <p:nvSpPr>
@@ -1511,13 +1753,6 @@
             <a:prstDash val="solid"/>
           </a:ln>
         </p:spPr>
-        <p:txBody>
-          <a:bodyPr/>
-          <a:lstStyle/>
-          <a:p>
-            <a:endParaRPr lang="zh-CN" altLang="en-US"/>
-          </a:p>
-        </p:txBody>
       </p:sp>
       <p:sp>
         <p:nvSpPr>
@@ -1543,13 +1778,6 @@
             <a:prstDash val="solid"/>
           </a:ln>
         </p:spPr>
-        <p:txBody>
-          <a:bodyPr/>
-          <a:lstStyle/>
-          <a:p>
-            <a:endParaRPr lang="zh-CN" altLang="en-US"/>
-          </a:p>
-        </p:txBody>
       </p:sp>
       <p:sp>
         <p:nvSpPr>
@@ -1575,13 +1803,6 @@
             <a:prstDash val="solid"/>
           </a:ln>
         </p:spPr>
-        <p:txBody>
-          <a:bodyPr/>
-          <a:lstStyle/>
-          <a:p>
-            <a:endParaRPr lang="zh-CN" altLang="en-US"/>
-          </a:p>
-        </p:txBody>
       </p:sp>
       <p:sp>
         <p:nvSpPr>
@@ -1607,13 +1828,6 @@
             <a:prstDash val="solid"/>
           </a:ln>
         </p:spPr>
-        <p:txBody>
-          <a:bodyPr/>
-          <a:lstStyle/>
-          <a:p>
-            <a:endParaRPr lang="zh-CN" altLang="en-US"/>
-          </a:p>
-        </p:txBody>
       </p:sp>
       <p:sp>
         <p:nvSpPr>
@@ -1639,13 +1853,6 @@
             <a:prstDash val="solid"/>
           </a:ln>
         </p:spPr>
-        <p:txBody>
-          <a:bodyPr/>
-          <a:lstStyle/>
-          <a:p>
-            <a:endParaRPr lang="zh-CN" altLang="en-US"/>
-          </a:p>
-        </p:txBody>
       </p:sp>
       <p:sp>
         <p:nvSpPr>
@@ -1671,13 +1878,6 @@
             <a:prstDash val="solid"/>
           </a:ln>
         </p:spPr>
-        <p:txBody>
-          <a:bodyPr/>
-          <a:lstStyle/>
-          <a:p>
-            <a:endParaRPr lang="zh-CN" altLang="en-US"/>
-          </a:p>
-        </p:txBody>
       </p:sp>
       <p:sp>
         <p:nvSpPr>
@@ -1700,7 +1900,7 @@
           <a:bodyPr wrap="square" lIns="0" tIns="0" rIns="0" bIns="0" rtlCol="0" anchor="ctr"/>
           <a:lstStyle/>
           <a:p>
-            <a:pPr marL="0" indent="0" algn="ctr">
+            <a:pPr algn="ctr" indent="0" marL="0">
               <a:buNone/>
             </a:pPr>
             <a:r>
@@ -1740,13 +1940,6 @@
             <a:prstDash val="solid"/>
           </a:ln>
         </p:spPr>
-        <p:txBody>
-          <a:bodyPr/>
-          <a:lstStyle/>
-          <a:p>
-            <a:endParaRPr lang="zh-CN" altLang="en-US"/>
-          </a:p>
-        </p:txBody>
       </p:sp>
       <p:sp>
         <p:nvSpPr>
@@ -1772,13 +1965,6 @@
             <a:prstDash val="solid"/>
           </a:ln>
         </p:spPr>
-        <p:txBody>
-          <a:bodyPr/>
-          <a:lstStyle/>
-          <a:p>
-            <a:endParaRPr lang="zh-CN" altLang="en-US"/>
-          </a:p>
-        </p:txBody>
       </p:sp>
       <p:sp>
         <p:nvSpPr>
@@ -1801,7 +1987,7 @@
           <a:bodyPr wrap="square" lIns="0" tIns="0" rIns="0" bIns="0" rtlCol="0" anchor="ctr"/>
           <a:lstStyle/>
           <a:p>
-            <a:pPr marL="0" indent="0" algn="ctr">
+            <a:pPr algn="ctr" indent="0" marL="0">
               <a:buNone/>
             </a:pPr>
             <a:r>
@@ -1840,7 +2026,7 @@
           <a:bodyPr wrap="square" lIns="0" tIns="0" rIns="0" bIns="0" rtlCol="0" anchor="ctr"/>
           <a:lstStyle/>
           <a:p>
-            <a:pPr marL="0" indent="0" algn="ctr">
+            <a:pPr algn="ctr" indent="0" marL="0">
               <a:buNone/>
             </a:pPr>
             <a:r>
@@ -1877,7 +2063,6 @@
         <a:solidFill>
           <a:srgbClr val="F5F5F7"/>
         </a:solidFill>
-        <a:effectLst/>
       </p:bgPr>
     </p:bg>
     <p:spTree>
@@ -1918,13 +2103,6 @@
             <a:prstDash val="solid"/>
           </a:ln>
         </p:spPr>
-        <p:txBody>
-          <a:bodyPr/>
-          <a:lstStyle/>
-          <a:p>
-            <a:endParaRPr lang="zh-CN" altLang="en-US"/>
-          </a:p>
-        </p:txBody>
       </p:sp>
       <p:sp>
         <p:nvSpPr>
@@ -1950,13 +2128,6 @@
             <a:prstDash val="solid"/>
           </a:ln>
         </p:spPr>
-        <p:txBody>
-          <a:bodyPr/>
-          <a:lstStyle/>
-          <a:p>
-            <a:endParaRPr lang="zh-CN" altLang="en-US"/>
-          </a:p>
-        </p:txBody>
       </p:sp>
       <p:sp>
         <p:nvSpPr>
@@ -1982,13 +2153,6 @@
             <a:prstDash val="solid"/>
           </a:ln>
         </p:spPr>
-        <p:txBody>
-          <a:bodyPr/>
-          <a:lstStyle/>
-          <a:p>
-            <a:endParaRPr lang="zh-CN" altLang="en-US"/>
-          </a:p>
-        </p:txBody>
       </p:sp>
       <p:sp>
         <p:nvSpPr>
@@ -2014,13 +2178,6 @@
             <a:prstDash val="solid"/>
           </a:ln>
         </p:spPr>
-        <p:txBody>
-          <a:bodyPr/>
-          <a:lstStyle/>
-          <a:p>
-            <a:endParaRPr lang="zh-CN" altLang="en-US"/>
-          </a:p>
-        </p:txBody>
       </p:sp>
       <p:sp>
         <p:nvSpPr>
@@ -2043,7 +2200,7 @@
           <a:bodyPr wrap="square" lIns="0" tIns="0" rIns="0" bIns="0" rtlCol="0" anchor="ctr"/>
           <a:lstStyle/>
           <a:p>
-            <a:pPr marL="0" indent="0" algn="ctr">
+            <a:pPr algn="ctr" indent="0" marL="0">
               <a:buNone/>
             </a:pPr>
             <a:r>
@@ -2082,7 +2239,7 @@
           <a:bodyPr wrap="square" lIns="0" tIns="0" rIns="0" bIns="0" rtlCol="0" anchor="ctr"/>
           <a:lstStyle/>
           <a:p>
-            <a:pPr marL="0" indent="0" algn="ctr">
+            <a:pPr algn="ctr" indent="0" marL="0">
               <a:buNone/>
             </a:pPr>
             <a:r>
@@ -2122,13 +2279,6 @@
             <a:prstDash val="solid"/>
           </a:ln>
         </p:spPr>
-        <p:txBody>
-          <a:bodyPr/>
-          <a:lstStyle/>
-          <a:p>
-            <a:endParaRPr lang="zh-CN" altLang="en-US"/>
-          </a:p>
-        </p:txBody>
       </p:sp>
       <p:sp>
         <p:nvSpPr>
@@ -2151,7 +2301,7 @@
           <a:bodyPr wrap="square" lIns="0" tIns="0" rIns="0" bIns="0" rtlCol="0" anchor="ctr"/>
           <a:lstStyle/>
           <a:p>
-            <a:pPr marL="0" indent="0" algn="ctr">
+            <a:pPr algn="ctr" indent="0" marL="0">
               <a:buNone/>
             </a:pPr>
             <a:r>
@@ -2190,7 +2340,7 @@
           <a:bodyPr wrap="square" lIns="0" tIns="0" rIns="0" bIns="0" rtlCol="0" anchor="ctr"/>
           <a:lstStyle/>
           <a:p>
-            <a:pPr marL="0" indent="0" algn="ctr">
+            <a:pPr algn="ctr" indent="0" marL="0">
               <a:buNone/>
             </a:pPr>
             <a:r>
@@ -2213,7 +2363,7 @@
   <p:clrMapOvr>
     <a:masterClrMapping/>
   </p:clrMapOvr>
-  <p:transition spd="med">
+  <p:transition spd="med" advClick="1">
     <p:fade/>
   </p:transition>
 </p:sld>
@@ -2227,7 +2377,6 @@
         <a:solidFill>
           <a:srgbClr val="F5F5F7"/>
         </a:solidFill>
-        <a:effectLst/>
       </p:bgPr>
     </p:bg>
     <p:spTree>
@@ -2246,31 +2395,40 @@
       </p:grpSpPr>
       <p:sp>
         <p:nvSpPr>
-          <p:cNvPr id="2" name="Shape 0"/>
-          <p:cNvSpPr/>
-          <p:nvPr/>
-        </p:nvSpPr>
-        <p:spPr>
-          <a:xfrm flipV="1">
-            <a:off x="950976" y="1133856"/>
-            <a:ext cx="1097280" cy="365760"/>
-          </a:xfrm>
-          <a:prstGeom prst="line">
-            <a:avLst/>
-          </a:prstGeom>
-          <a:noFill/>
-          <a:ln w="9525">
-            <a:solidFill>
-              <a:srgbClr val="E5E5EA"/>
-            </a:solidFill>
-            <a:prstDash val="solid"/>
-          </a:ln>
-        </p:spPr>
-        <p:txBody>
-          <a:bodyPr/>
-          <a:lstStyle/>
-          <a:p>
-            <a:endParaRPr lang="zh-CN" altLang="en-US"/>
+          <p:cNvPr id="2" name="Text 0"/>
+          <p:cNvSpPr/>
+          <p:nvPr/>
+        </p:nvSpPr>
+        <p:spPr>
+          <a:xfrm>
+            <a:off x="640080" y="502920"/>
+            <a:ext cx="7772400" cy="411480"/>
+          </a:xfrm>
+          <a:prstGeom prst="rect">
+            <a:avLst/>
+          </a:prstGeom>
+          <a:noFill/>
+          <a:ln/>
+        </p:spPr>
+        <p:txBody>
+          <a:bodyPr wrap="square" lIns="0" tIns="0" rIns="0" bIns="0" rtlCol="0" anchor="ctr"/>
+          <a:lstStyle/>
+          <a:p>
+            <a:pPr indent="0" marL="0">
+              <a:buNone/>
+            </a:pPr>
+            <a:r>
+              <a:rPr lang="en-US" sz="2800" b="1" dirty="0">
+                <a:solidFill>
+                  <a:srgbClr val="111111"/>
+                </a:solidFill>
+                <a:latin typeface="Arial" pitchFamily="34" charset="0"/>
+                <a:ea typeface="Arial" pitchFamily="34" charset="-122"/>
+                <a:cs typeface="Arial" pitchFamily="34" charset="-120"/>
+              </a:rPr>
+              <a:t>人工审核痛点。</a:t>
+            </a:r>
+            <a:endParaRPr lang="en-US" sz="2800" dirty="0"/>
           </a:p>
         </p:txBody>
       </p:sp>
@@ -2282,27 +2440,29 @@
         </p:nvSpPr>
         <p:spPr>
           <a:xfrm>
-            <a:off x="2048256" y="1133856"/>
-            <a:ext cx="731520" cy="731520"/>
-          </a:xfrm>
-          <a:prstGeom prst="line">
-            <a:avLst/>
-          </a:prstGeom>
-          <a:noFill/>
-          <a:ln w="9525">
-            <a:solidFill>
-              <a:srgbClr val="E5E5EA"/>
-            </a:solidFill>
-            <a:prstDash val="solid"/>
-          </a:ln>
-        </p:spPr>
-        <p:txBody>
-          <a:bodyPr/>
-          <a:lstStyle/>
-          <a:p>
-            <a:endParaRPr lang="zh-CN" altLang="en-US"/>
-          </a:p>
-        </p:txBody>
+            <a:off x="640080" y="1371600"/>
+            <a:ext cx="1874520" cy="2194560"/>
+          </a:xfrm>
+          <a:prstGeom prst="rect">
+            <a:avLst/>
+          </a:prstGeom>
+          <a:solidFill>
+            <a:srgbClr val="FFFFFF"/>
+          </a:solidFill>
+          <a:ln w="12700">
+            <a:solidFill>
+              <a:srgbClr val="FFFFFF"/>
+            </a:solidFill>
+            <a:prstDash val="solid"/>
+          </a:ln>
+          <a:effectLst>
+            <a:outerShdw sx="100000" sy="100000" kx="0" ky="0" algn="bl" rotWithShape="0" blurRad="228600" dist="50800" dir="8100000">
+              <a:srgbClr val="000000">
+                <a:alpha val="6000"/>
+              </a:srgbClr>
+            </a:outerShdw>
+          </a:effectLst>
+        </p:spPr>
       </p:sp>
       <p:sp>
         <p:nvSpPr>
@@ -2312,85 +2472,98 @@
         </p:nvSpPr>
         <p:spPr>
           <a:xfrm>
-            <a:off x="950976" y="1499616"/>
-            <a:ext cx="1828800" cy="365760"/>
-          </a:xfrm>
-          <a:prstGeom prst="line">
-            <a:avLst/>
-          </a:prstGeom>
-          <a:noFill/>
-          <a:ln w="9525">
-            <a:solidFill>
-              <a:srgbClr val="E5E5EA"/>
-            </a:solidFill>
-            <a:prstDash val="solid"/>
-          </a:ln>
-        </p:spPr>
-        <p:txBody>
-          <a:bodyPr/>
-          <a:lstStyle/>
-          <a:p>
-            <a:endParaRPr lang="zh-CN" altLang="en-US"/>
-          </a:p>
-        </p:txBody>
-      </p:sp>
-      <p:sp>
-        <p:nvSpPr>
-          <p:cNvPr id="5" name="Shape 3"/>
-          <p:cNvSpPr/>
-          <p:nvPr/>
-        </p:nvSpPr>
-        <p:spPr>
-          <a:xfrm>
-            <a:off x="6437376" y="1408176"/>
-            <a:ext cx="1005840" cy="365760"/>
-          </a:xfrm>
-          <a:prstGeom prst="line">
-            <a:avLst/>
-          </a:prstGeom>
-          <a:noFill/>
-          <a:ln w="9525">
-            <a:solidFill>
-              <a:srgbClr val="E5E5EA"/>
-            </a:solidFill>
-            <a:prstDash val="solid"/>
-          </a:ln>
-        </p:spPr>
-        <p:txBody>
-          <a:bodyPr/>
-          <a:lstStyle/>
-          <a:p>
-            <a:endParaRPr lang="zh-CN" altLang="en-US"/>
-          </a:p>
-        </p:txBody>
-      </p:sp>
-      <p:sp>
-        <p:nvSpPr>
-          <p:cNvPr id="6" name="Shape 4"/>
-          <p:cNvSpPr/>
-          <p:nvPr/>
-        </p:nvSpPr>
-        <p:spPr>
-          <a:xfrm flipV="1">
-            <a:off x="7443216" y="1042416"/>
-            <a:ext cx="640080" cy="731520"/>
-          </a:xfrm>
-          <a:prstGeom prst="line">
-            <a:avLst/>
-          </a:prstGeom>
-          <a:noFill/>
-          <a:ln w="9525">
-            <a:solidFill>
-              <a:srgbClr val="E5E5EA"/>
-            </a:solidFill>
-            <a:prstDash val="solid"/>
-          </a:ln>
-        </p:spPr>
-        <p:txBody>
-          <a:bodyPr/>
-          <a:lstStyle/>
-          <a:p>
-            <a:endParaRPr lang="zh-CN" altLang="en-US"/>
+            <a:off x="804672" y="1600200"/>
+            <a:ext cx="109728" cy="109728"/>
+          </a:xfrm>
+          <a:prstGeom prst="rect">
+            <a:avLst/>
+          </a:prstGeom>
+          <a:solidFill>
+            <a:srgbClr val="5B8DEF"/>
+          </a:solidFill>
+          <a:ln w="12700">
+            <a:solidFill>
+              <a:srgbClr val="5B8DEF"/>
+            </a:solidFill>
+            <a:prstDash val="solid"/>
+          </a:ln>
+        </p:spPr>
+      </p:sp>
+      <p:sp>
+        <p:nvSpPr>
+          <p:cNvPr id="5" name="Text 3"/>
+          <p:cNvSpPr/>
+          <p:nvPr/>
+        </p:nvSpPr>
+        <p:spPr>
+          <a:xfrm>
+            <a:off x="804672" y="1965960"/>
+            <a:ext cx="1554480" cy="457200"/>
+          </a:xfrm>
+          <a:prstGeom prst="rect">
+            <a:avLst/>
+          </a:prstGeom>
+          <a:noFill/>
+          <a:ln/>
+        </p:spPr>
+        <p:txBody>
+          <a:bodyPr wrap="square" lIns="0" tIns="0" rIns="0" bIns="0" rtlCol="0" anchor="ctr"/>
+          <a:lstStyle/>
+          <a:p>
+            <a:pPr indent="0" marL="0">
+              <a:buNone/>
+            </a:pPr>
+            <a:r>
+              <a:rPr lang="en-US" sz="2000" b="1" dirty="0">
+                <a:solidFill>
+                  <a:srgbClr val="111111"/>
+                </a:solidFill>
+                <a:latin typeface="Arial" pitchFamily="34" charset="0"/>
+                <a:ea typeface="Arial" pitchFamily="34" charset="-122"/>
+                <a:cs typeface="Arial" pitchFamily="34" charset="-120"/>
+              </a:rPr>
+              <a:t>10 分钟</a:t>
+            </a:r>
+            <a:endParaRPr lang="en-US" sz="2000" dirty="0"/>
+          </a:p>
+        </p:txBody>
+      </p:sp>
+      <p:sp>
+        <p:nvSpPr>
+          <p:cNvPr id="6" name="Text 4"/>
+          <p:cNvSpPr/>
+          <p:nvPr/>
+        </p:nvSpPr>
+        <p:spPr>
+          <a:xfrm>
+            <a:off x="804672" y="2514600"/>
+            <a:ext cx="1554480" cy="731520"/>
+          </a:xfrm>
+          <a:prstGeom prst="rect">
+            <a:avLst/>
+          </a:prstGeom>
+          <a:noFill/>
+          <a:ln/>
+        </p:spPr>
+        <p:txBody>
+          <a:bodyPr wrap="square" lIns="0" tIns="0" rIns="0" bIns="0" rtlCol="0" anchor="ctr"/>
+          <a:lstStyle/>
+          <a:p>
+            <a:pPr indent="0" marL="0">
+              <a:buNone/>
+            </a:pPr>
+            <a:r>
+              <a:rPr lang="en-US" sz="1300" dirty="0">
+                <a:solidFill>
+                  <a:srgbClr val="8E8E93"/>
+                </a:solidFill>
+                <a:latin typeface="Arial" pitchFamily="34" charset="0"/>
+                <a:ea typeface="Arial" pitchFamily="34" charset="-122"/>
+                <a:cs typeface="Arial" pitchFamily="34" charset="-120"/>
+              </a:rPr>
+              <a:t>单票人工传递</a:t>
+            </a:r>
+            <a:endParaRPr lang="en-US" sz="1300" dirty="0"/>
           </a:p>
         </p:txBody>
       </p:sp>
@@ -2401,28 +2574,30 @@
           <p:nvPr/>
         </p:nvSpPr>
         <p:spPr>
-          <a:xfrm flipV="1">
-            <a:off x="6437376" y="1042416"/>
-            <a:ext cx="1645920" cy="365760"/>
-          </a:xfrm>
-          <a:prstGeom prst="line">
-            <a:avLst/>
-          </a:prstGeom>
-          <a:noFill/>
-          <a:ln w="9525">
-            <a:solidFill>
-              <a:srgbClr val="E5E5EA"/>
-            </a:solidFill>
-            <a:prstDash val="solid"/>
-          </a:ln>
-        </p:spPr>
-        <p:txBody>
-          <a:bodyPr/>
-          <a:lstStyle/>
-          <a:p>
-            <a:endParaRPr lang="zh-CN" altLang="en-US"/>
-          </a:p>
-        </p:txBody>
+          <a:xfrm>
+            <a:off x="2743200" y="1371600"/>
+            <a:ext cx="1874520" cy="2194560"/>
+          </a:xfrm>
+          <a:prstGeom prst="rect">
+            <a:avLst/>
+          </a:prstGeom>
+          <a:solidFill>
+            <a:srgbClr val="FFFFFF"/>
+          </a:solidFill>
+          <a:ln w="12700">
+            <a:solidFill>
+              <a:srgbClr val="FFFFFF"/>
+            </a:solidFill>
+            <a:prstDash val="solid"/>
+          </a:ln>
+          <a:effectLst>
+            <a:outerShdw sx="100000" sy="100000" kx="0" ky="0" algn="bl" rotWithShape="0" blurRad="228600" dist="50800" dir="8100000">
+              <a:srgbClr val="000000">
+                <a:alpha val="6000"/>
+              </a:srgbClr>
+            </a:outerShdw>
+          </a:effectLst>
+        </p:spPr>
       </p:sp>
       <p:sp>
         <p:nvSpPr>
@@ -2432,87 +2607,98 @@
         </p:nvSpPr>
         <p:spPr>
           <a:xfrm>
-            <a:off x="1408176" y="3511296"/>
-            <a:ext cx="1188720" cy="365760"/>
-          </a:xfrm>
-          <a:prstGeom prst="line">
-            <a:avLst/>
-          </a:prstGeom>
-          <a:noFill/>
-          <a:ln w="9525">
-            <a:solidFill>
-              <a:srgbClr val="E5E5EA"/>
-            </a:solidFill>
-            <a:prstDash val="solid"/>
-          </a:ln>
-        </p:spPr>
-        <p:txBody>
-          <a:bodyPr/>
-          <a:lstStyle/>
-          <a:p>
-            <a:endParaRPr lang="zh-CN" altLang="en-US"/>
-          </a:p>
-        </p:txBody>
-      </p:sp>
-      <p:sp>
-        <p:nvSpPr>
-          <p:cNvPr id="9" name="Shape 7"/>
-          <p:cNvSpPr/>
-          <p:nvPr/>
-        </p:nvSpPr>
-        <p:spPr>
-          <a:xfrm>
-            <a:off x="6894576" y="3602736"/>
-            <a:ext cx="1005840" cy="365760"/>
-          </a:xfrm>
-          <a:prstGeom prst="line">
-            <a:avLst/>
-          </a:prstGeom>
-          <a:noFill/>
-          <a:ln w="9525">
-            <a:solidFill>
-              <a:srgbClr val="E5E5EA"/>
-            </a:solidFill>
-            <a:prstDash val="solid"/>
-          </a:ln>
-        </p:spPr>
-        <p:txBody>
-          <a:bodyPr/>
-          <a:lstStyle/>
-          <a:p>
-            <a:endParaRPr lang="zh-CN" altLang="en-US"/>
-          </a:p>
-        </p:txBody>
-      </p:sp>
-      <p:sp>
-        <p:nvSpPr>
-          <p:cNvPr id="10" name="Shape 8"/>
-          <p:cNvSpPr/>
-          <p:nvPr/>
-        </p:nvSpPr>
-        <p:spPr>
-          <a:xfrm>
-            <a:off x="914400" y="1463040"/>
-            <a:ext cx="82296" cy="82296"/>
-          </a:xfrm>
-          <a:prstGeom prst="rect">
-            <a:avLst/>
-          </a:prstGeom>
-          <a:solidFill>
-            <a:srgbClr val="8E8E93"/>
-          </a:solidFill>
-          <a:ln w="12700">
-            <a:solidFill>
-              <a:srgbClr val="8E8E93"/>
-            </a:solidFill>
-            <a:prstDash val="solid"/>
-          </a:ln>
-        </p:spPr>
-        <p:txBody>
-          <a:bodyPr/>
-          <a:lstStyle/>
-          <a:p>
-            <a:endParaRPr lang="zh-CN" altLang="en-US"/>
+            <a:off x="2907792" y="1600200"/>
+            <a:ext cx="109728" cy="109728"/>
+          </a:xfrm>
+          <a:prstGeom prst="rect">
+            <a:avLst/>
+          </a:prstGeom>
+          <a:solidFill>
+            <a:srgbClr val="C7C7CC"/>
+          </a:solidFill>
+          <a:ln w="12700">
+            <a:solidFill>
+              <a:srgbClr val="C7C7CC"/>
+            </a:solidFill>
+            <a:prstDash val="solid"/>
+          </a:ln>
+        </p:spPr>
+      </p:sp>
+      <p:sp>
+        <p:nvSpPr>
+          <p:cNvPr id="9" name="Text 7"/>
+          <p:cNvSpPr/>
+          <p:nvPr/>
+        </p:nvSpPr>
+        <p:spPr>
+          <a:xfrm>
+            <a:off x="2907792" y="1965960"/>
+            <a:ext cx="1554480" cy="457200"/>
+          </a:xfrm>
+          <a:prstGeom prst="rect">
+            <a:avLst/>
+          </a:prstGeom>
+          <a:noFill/>
+          <a:ln/>
+        </p:spPr>
+        <p:txBody>
+          <a:bodyPr wrap="square" lIns="0" tIns="0" rIns="0" bIns="0" rtlCol="0" anchor="ctr"/>
+          <a:lstStyle/>
+          <a:p>
+            <a:pPr indent="0" marL="0">
+              <a:buNone/>
+            </a:pPr>
+            <a:r>
+              <a:rPr lang="en-US" sz="2000" b="1" dirty="0">
+                <a:solidFill>
+                  <a:srgbClr val="111111"/>
+                </a:solidFill>
+                <a:latin typeface="Arial" pitchFamily="34" charset="0"/>
+                <a:ea typeface="Arial" pitchFamily="34" charset="-122"/>
+                <a:cs typeface="Arial" pitchFamily="34" charset="-120"/>
+              </a:rPr>
+              <a:t>易漏检</a:t>
+            </a:r>
+            <a:endParaRPr lang="en-US" sz="2000" dirty="0"/>
+          </a:p>
+        </p:txBody>
+      </p:sp>
+      <p:sp>
+        <p:nvSpPr>
+          <p:cNvPr id="10" name="Text 8"/>
+          <p:cNvSpPr/>
+          <p:nvPr/>
+        </p:nvSpPr>
+        <p:spPr>
+          <a:xfrm>
+            <a:off x="2907792" y="2514600"/>
+            <a:ext cx="1554480" cy="731520"/>
+          </a:xfrm>
+          <a:prstGeom prst="rect">
+            <a:avLst/>
+          </a:prstGeom>
+          <a:noFill/>
+          <a:ln/>
+        </p:spPr>
+        <p:txBody>
+          <a:bodyPr wrap="square" lIns="0" tIns="0" rIns="0" bIns="0" rtlCol="0" anchor="ctr"/>
+          <a:lstStyle/>
+          <a:p>
+            <a:pPr indent="0" marL="0">
+              <a:buNone/>
+            </a:pPr>
+            <a:r>
+              <a:rPr lang="en-US" sz="1300" dirty="0">
+                <a:solidFill>
+                  <a:srgbClr val="8E8E93"/>
+                </a:solidFill>
+                <a:latin typeface="Arial" pitchFamily="34" charset="0"/>
+                <a:ea typeface="Arial" pitchFamily="34" charset="-122"/>
+                <a:cs typeface="Arial" pitchFamily="34" charset="-120"/>
+              </a:rPr>
+              <a:t>25 项措施 × 5 列确认</a:t>
+            </a:r>
+            <a:endParaRPr lang="en-US" sz="1300" dirty="0"/>
           </a:p>
         </p:txBody>
       </p:sp>
@@ -2524,8 +2710,40 @@
         </p:nvSpPr>
         <p:spPr>
           <a:xfrm>
-            <a:off x="2011680" y="1097280"/>
-            <a:ext cx="64008" cy="64008"/>
+            <a:off x="4846320" y="1371600"/>
+            <a:ext cx="1874520" cy="2194560"/>
+          </a:xfrm>
+          <a:prstGeom prst="rect">
+            <a:avLst/>
+          </a:prstGeom>
+          <a:solidFill>
+            <a:srgbClr val="FFFFFF"/>
+          </a:solidFill>
+          <a:ln w="12700">
+            <a:solidFill>
+              <a:srgbClr val="FFFFFF"/>
+            </a:solidFill>
+            <a:prstDash val="solid"/>
+          </a:ln>
+          <a:effectLst>
+            <a:outerShdw sx="100000" sy="100000" kx="0" ky="0" algn="bl" rotWithShape="0" blurRad="228600" dist="50800" dir="8100000">
+              <a:srgbClr val="000000">
+                <a:alpha val="6000"/>
+              </a:srgbClr>
+            </a:outerShdw>
+          </a:effectLst>
+        </p:spPr>
+      </p:sp>
+      <p:sp>
+        <p:nvSpPr>
+          <p:cNvPr id="12" name="Shape 10"/>
+          <p:cNvSpPr/>
+          <p:nvPr/>
+        </p:nvSpPr>
+        <p:spPr>
+          <a:xfrm>
+            <a:off x="5010912" y="1600200"/>
+            <a:ext cx="109728" cy="109728"/>
           </a:xfrm>
           <a:prstGeom prst="rect">
             <a:avLst/>
@@ -2540,88 +2758,144 @@
             <a:prstDash val="solid"/>
           </a:ln>
         </p:spPr>
-        <p:txBody>
-          <a:bodyPr/>
-          <a:lstStyle/>
-          <a:p>
-            <a:endParaRPr lang="zh-CN" altLang="en-US"/>
-          </a:p>
-        </p:txBody>
-      </p:sp>
-      <p:sp>
-        <p:nvSpPr>
-          <p:cNvPr id="12" name="Shape 10"/>
-          <p:cNvSpPr/>
-          <p:nvPr/>
-        </p:nvSpPr>
-        <p:spPr>
-          <a:xfrm>
-            <a:off x="2743200" y="1828800"/>
-            <a:ext cx="54864" cy="54864"/>
-          </a:xfrm>
-          <a:prstGeom prst="rect">
-            <a:avLst/>
-          </a:prstGeom>
-          <a:solidFill>
-            <a:srgbClr val="AEAEB2"/>
-          </a:solidFill>
-          <a:ln w="12700">
-            <a:solidFill>
-              <a:srgbClr val="AEAEB2"/>
-            </a:solidFill>
-            <a:prstDash val="solid"/>
-          </a:ln>
-        </p:spPr>
-        <p:txBody>
-          <a:bodyPr/>
-          <a:lstStyle/>
-          <a:p>
-            <a:endParaRPr lang="zh-CN" altLang="en-US"/>
-          </a:p>
-        </p:txBody>
-      </p:sp>
-      <p:sp>
-        <p:nvSpPr>
-          <p:cNvPr id="13" name="Shape 11"/>
-          <p:cNvSpPr/>
-          <p:nvPr/>
-        </p:nvSpPr>
-        <p:spPr>
-          <a:xfrm>
-            <a:off x="6400800" y="1371600"/>
-            <a:ext cx="73152" cy="73152"/>
-          </a:xfrm>
-          <a:prstGeom prst="rect">
-            <a:avLst/>
-          </a:prstGeom>
-          <a:solidFill>
-            <a:srgbClr val="8E8E93"/>
-          </a:solidFill>
-          <a:ln w="12700">
-            <a:solidFill>
-              <a:srgbClr val="8E8E93"/>
-            </a:solidFill>
-            <a:prstDash val="solid"/>
-          </a:ln>
-        </p:spPr>
-        <p:txBody>
-          <a:bodyPr/>
-          <a:lstStyle/>
-          <a:p>
-            <a:endParaRPr lang="zh-CN" altLang="en-US"/>
-          </a:p>
-        </p:txBody>
-      </p:sp>
-      <p:sp>
-        <p:nvSpPr>
-          <p:cNvPr id="14" name="Shape 12"/>
-          <p:cNvSpPr/>
-          <p:nvPr/>
-        </p:nvSpPr>
-        <p:spPr>
-          <a:xfrm>
-            <a:off x="7406640" y="1737360"/>
-            <a:ext cx="54864" cy="54864"/>
+      </p:sp>
+      <p:sp>
+        <p:nvSpPr>
+          <p:cNvPr id="13" name="Text 11"/>
+          <p:cNvSpPr/>
+          <p:nvPr/>
+        </p:nvSpPr>
+        <p:spPr>
+          <a:xfrm>
+            <a:off x="5010912" y="1965960"/>
+            <a:ext cx="1554480" cy="457200"/>
+          </a:xfrm>
+          <a:prstGeom prst="rect">
+            <a:avLst/>
+          </a:prstGeom>
+          <a:noFill/>
+          <a:ln/>
+        </p:spPr>
+        <p:txBody>
+          <a:bodyPr wrap="square" lIns="0" tIns="0" rIns="0" bIns="0" rtlCol="0" anchor="ctr"/>
+          <a:lstStyle/>
+          <a:p>
+            <a:pPr indent="0" marL="0">
+              <a:buNone/>
+            </a:pPr>
+            <a:r>
+              <a:rPr lang="en-US" sz="2000" b="1" dirty="0">
+                <a:solidFill>
+                  <a:srgbClr val="111111"/>
+                </a:solidFill>
+                <a:latin typeface="Arial" pitchFamily="34" charset="0"/>
+                <a:ea typeface="Arial" pitchFamily="34" charset="-122"/>
+                <a:cs typeface="Arial" pitchFamily="34" charset="-120"/>
+              </a:rPr>
+              <a:t>人工审核</a:t>
+            </a:r>
+            <a:endParaRPr lang="en-US" sz="2000" dirty="0"/>
+          </a:p>
+        </p:txBody>
+      </p:sp>
+      <p:sp>
+        <p:nvSpPr>
+          <p:cNvPr id="14" name="Text 12"/>
+          <p:cNvSpPr/>
+          <p:nvPr/>
+        </p:nvSpPr>
+        <p:spPr>
+          <a:xfrm>
+            <a:off x="5010912" y="2514600"/>
+            <a:ext cx="1554480" cy="731520"/>
+          </a:xfrm>
+          <a:prstGeom prst="rect">
+            <a:avLst/>
+          </a:prstGeom>
+          <a:noFill/>
+          <a:ln/>
+        </p:spPr>
+        <p:txBody>
+          <a:bodyPr wrap="square" lIns="0" tIns="0" rIns="0" bIns="0" rtlCol="0" anchor="ctr"/>
+          <a:lstStyle/>
+          <a:p>
+            <a:pPr indent="0" marL="0">
+              <a:buNone/>
+            </a:pPr>
+            <a:r>
+              <a:rPr lang="en-US" sz="1300" dirty="0">
+                <a:solidFill>
+                  <a:srgbClr val="8E8E93"/>
+                </a:solidFill>
+                <a:latin typeface="Arial" pitchFamily="34" charset="0"/>
+                <a:ea typeface="Arial" pitchFamily="34" charset="-122"/>
+                <a:cs typeface="Arial" pitchFamily="34" charset="-120"/>
+              </a:rPr>
+              <a:t>审批凭人工经验，</a:t>
+            </a:r>
+            <a:endParaRPr lang="en-US" sz="1300" dirty="0"/>
+          </a:p>
+          <a:p>
+            <a:pPr indent="0" marL="0">
+              <a:buNone/>
+            </a:pPr>
+            <a:r>
+              <a:rPr lang="en-US" sz="1300" dirty="0">
+                <a:solidFill>
+                  <a:srgbClr val="8E8E93"/>
+                </a:solidFill>
+                <a:latin typeface="Arial" pitchFamily="34" charset="0"/>
+                <a:ea typeface="Arial" pitchFamily="34" charset="-122"/>
+                <a:cs typeface="Arial" pitchFamily="34" charset="-120"/>
+              </a:rPr>
+              <a:t>自动化审核更规范</a:t>
+            </a:r>
+            <a:endParaRPr lang="en-US" sz="1300" dirty="0"/>
+          </a:p>
+        </p:txBody>
+      </p:sp>
+      <p:sp>
+        <p:nvSpPr>
+          <p:cNvPr id="15" name="Shape 13"/>
+          <p:cNvSpPr/>
+          <p:nvPr/>
+        </p:nvSpPr>
+        <p:spPr>
+          <a:xfrm>
+            <a:off x="6949440" y="1371600"/>
+            <a:ext cx="1874520" cy="2194560"/>
+          </a:xfrm>
+          <a:prstGeom prst="rect">
+            <a:avLst/>
+          </a:prstGeom>
+          <a:solidFill>
+            <a:srgbClr val="FFFFFF"/>
+          </a:solidFill>
+          <a:ln w="12700">
+            <a:solidFill>
+              <a:srgbClr val="FFFFFF"/>
+            </a:solidFill>
+            <a:prstDash val="solid"/>
+          </a:ln>
+          <a:effectLst>
+            <a:outerShdw sx="100000" sy="100000" kx="0" ky="0" algn="bl" rotWithShape="0" blurRad="228600" dist="50800" dir="8100000">
+              <a:srgbClr val="000000">
+                <a:alpha val="6000"/>
+              </a:srgbClr>
+            </a:outerShdw>
+          </a:effectLst>
+        </p:spPr>
+      </p:sp>
+      <p:sp>
+        <p:nvSpPr>
+          <p:cNvPr id="16" name="Shape 14"/>
+          <p:cNvSpPr/>
+          <p:nvPr/>
+        </p:nvSpPr>
+        <p:spPr>
+          <a:xfrm>
+            <a:off x="7114032" y="1600200"/>
+            <a:ext cx="109728" cy="109728"/>
           </a:xfrm>
           <a:prstGeom prst="rect">
             <a:avLst/>
@@ -2636,184 +2910,17 @@
             <a:prstDash val="solid"/>
           </a:ln>
         </p:spPr>
-        <p:txBody>
-          <a:bodyPr/>
-          <a:lstStyle/>
-          <a:p>
-            <a:endParaRPr lang="zh-CN" altLang="en-US"/>
-          </a:p>
-        </p:txBody>
-      </p:sp>
-      <p:sp>
-        <p:nvSpPr>
-          <p:cNvPr id="15" name="Shape 13"/>
-          <p:cNvSpPr/>
-          <p:nvPr/>
-        </p:nvSpPr>
-        <p:spPr>
-          <a:xfrm>
-            <a:off x="8046720" y="1005840"/>
-            <a:ext cx="64008" cy="64008"/>
-          </a:xfrm>
-          <a:prstGeom prst="rect">
-            <a:avLst/>
-          </a:prstGeom>
-          <a:solidFill>
-            <a:srgbClr val="AEAEB2"/>
-          </a:solidFill>
-          <a:ln w="12700">
-            <a:solidFill>
-              <a:srgbClr val="AEAEB2"/>
-            </a:solidFill>
-            <a:prstDash val="solid"/>
-          </a:ln>
-        </p:spPr>
-        <p:txBody>
-          <a:bodyPr/>
-          <a:lstStyle/>
-          <a:p>
-            <a:endParaRPr lang="zh-CN" altLang="en-US"/>
-          </a:p>
-        </p:txBody>
-      </p:sp>
-      <p:sp>
-        <p:nvSpPr>
-          <p:cNvPr id="16" name="Shape 14"/>
-          <p:cNvSpPr/>
-          <p:nvPr/>
-        </p:nvSpPr>
-        <p:spPr>
-          <a:xfrm>
-            <a:off x="1371600" y="3474720"/>
-            <a:ext cx="64008" cy="64008"/>
-          </a:xfrm>
-          <a:prstGeom prst="rect">
-            <a:avLst/>
-          </a:prstGeom>
-          <a:solidFill>
-            <a:srgbClr val="C7C7CC"/>
-          </a:solidFill>
-          <a:ln w="12700">
-            <a:solidFill>
-              <a:srgbClr val="C7C7CC"/>
-            </a:solidFill>
-            <a:prstDash val="solid"/>
-          </a:ln>
-        </p:spPr>
-        <p:txBody>
-          <a:bodyPr/>
-          <a:lstStyle/>
-          <a:p>
-            <a:endParaRPr lang="zh-CN" altLang="en-US"/>
-          </a:p>
-        </p:txBody>
-      </p:sp>
-      <p:sp>
-        <p:nvSpPr>
-          <p:cNvPr id="17" name="Shape 15"/>
-          <p:cNvSpPr/>
-          <p:nvPr/>
-        </p:nvSpPr>
-        <p:spPr>
-          <a:xfrm>
-            <a:off x="2560320" y="3840480"/>
-            <a:ext cx="45720" cy="45720"/>
-          </a:xfrm>
-          <a:prstGeom prst="rect">
-            <a:avLst/>
-          </a:prstGeom>
-          <a:solidFill>
-            <a:srgbClr val="D1D1D6"/>
-          </a:solidFill>
-          <a:ln w="12700">
-            <a:solidFill>
-              <a:srgbClr val="D1D1D6"/>
-            </a:solidFill>
-            <a:prstDash val="solid"/>
-          </a:ln>
-        </p:spPr>
-        <p:txBody>
-          <a:bodyPr/>
-          <a:lstStyle/>
-          <a:p>
-            <a:endParaRPr lang="zh-CN" altLang="en-US"/>
-          </a:p>
-        </p:txBody>
-      </p:sp>
-      <p:sp>
-        <p:nvSpPr>
-          <p:cNvPr id="18" name="Shape 16"/>
-          <p:cNvSpPr/>
-          <p:nvPr/>
-        </p:nvSpPr>
-        <p:spPr>
-          <a:xfrm>
-            <a:off x="6858000" y="3566160"/>
-            <a:ext cx="73152" cy="73152"/>
-          </a:xfrm>
-          <a:prstGeom prst="rect">
-            <a:avLst/>
-          </a:prstGeom>
-          <a:solidFill>
-            <a:srgbClr val="8E8E93"/>
-          </a:solidFill>
-          <a:ln w="12700">
-            <a:solidFill>
-              <a:srgbClr val="8E8E93"/>
-            </a:solidFill>
-            <a:prstDash val="solid"/>
-          </a:ln>
-        </p:spPr>
-        <p:txBody>
-          <a:bodyPr/>
-          <a:lstStyle/>
-          <a:p>
-            <a:endParaRPr lang="zh-CN" altLang="en-US"/>
-          </a:p>
-        </p:txBody>
-      </p:sp>
-      <p:sp>
-        <p:nvSpPr>
-          <p:cNvPr id="19" name="Shape 17"/>
-          <p:cNvSpPr/>
-          <p:nvPr/>
-        </p:nvSpPr>
-        <p:spPr>
-          <a:xfrm>
-            <a:off x="7863840" y="3931920"/>
-            <a:ext cx="54864" cy="54864"/>
-          </a:xfrm>
-          <a:prstGeom prst="rect">
-            <a:avLst/>
-          </a:prstGeom>
-          <a:solidFill>
-            <a:srgbClr val="C7C7CC"/>
-          </a:solidFill>
-          <a:ln w="12700">
-            <a:solidFill>
-              <a:srgbClr val="C7C7CC"/>
-            </a:solidFill>
-            <a:prstDash val="solid"/>
-          </a:ln>
-        </p:spPr>
-        <p:txBody>
-          <a:bodyPr/>
-          <a:lstStyle/>
-          <a:p>
-            <a:endParaRPr lang="zh-CN" altLang="en-US"/>
-          </a:p>
-        </p:txBody>
-      </p:sp>
-      <p:sp>
-        <p:nvSpPr>
-          <p:cNvPr id="20" name="Text 18"/>
-          <p:cNvSpPr/>
-          <p:nvPr/>
-        </p:nvSpPr>
-        <p:spPr>
-          <a:xfrm>
-            <a:off x="731520" y="2057400"/>
-            <a:ext cx="7680960" cy="411480"/>
+      </p:sp>
+      <p:sp>
+        <p:nvSpPr>
+          <p:cNvPr id="17" name="Text 15"/>
+          <p:cNvSpPr/>
+          <p:nvPr/>
+        </p:nvSpPr>
+        <p:spPr>
+          <a:xfrm>
+            <a:off x="7114032" y="1965960"/>
+            <a:ext cx="1554480" cy="457200"/>
           </a:xfrm>
           <a:prstGeom prst="rect">
             <a:avLst/>
@@ -2825,11 +2932,11 @@
           <a:bodyPr wrap="square" lIns="0" tIns="0" rIns="0" bIns="0" rtlCol="0" anchor="ctr"/>
           <a:lstStyle/>
           <a:p>
-            <a:pPr marL="0" indent="0" algn="ctr">
-              <a:buNone/>
-            </a:pPr>
-            <a:r>
-              <a:rPr lang="en-US" sz="2800" b="1" dirty="0">
+            <a:pPr indent="0" marL="0">
+              <a:buNone/>
+            </a:pPr>
+            <a:r>
+              <a:rPr lang="en-US" sz="2000" b="1" dirty="0">
                 <a:solidFill>
                   <a:srgbClr val="111111"/>
                 </a:solidFill>
@@ -2837,22 +2944,22 @@
                 <a:ea typeface="Arial" pitchFamily="34" charset="-122"/>
                 <a:cs typeface="Arial" pitchFamily="34" charset="-120"/>
               </a:rPr>
-              <a:t>拍照一张带气作业票</a:t>
-            </a:r>
-            <a:endParaRPr lang="en-US" sz="2800" dirty="0"/>
-          </a:p>
-        </p:txBody>
-      </p:sp>
-      <p:sp>
-        <p:nvSpPr>
-          <p:cNvPr id="21" name="Text 19"/>
-          <p:cNvSpPr/>
-          <p:nvPr/>
-        </p:nvSpPr>
-        <p:spPr>
-          <a:xfrm>
-            <a:off x="731520" y="2606040"/>
-            <a:ext cx="7680960" cy="365760"/>
+              <a:t>数据沉睡</a:t>
+            </a:r>
+            <a:endParaRPr lang="en-US" sz="2000" dirty="0"/>
+          </a:p>
+        </p:txBody>
+      </p:sp>
+      <p:sp>
+        <p:nvSpPr>
+          <p:cNvPr id="18" name="Text 16"/>
+          <p:cNvSpPr/>
+          <p:nvPr/>
+        </p:nvSpPr>
+        <p:spPr>
+          <a:xfrm>
+            <a:off x="7114032" y="2514600"/>
+            <a:ext cx="1554480" cy="731520"/>
           </a:xfrm>
           <a:prstGeom prst="rect">
             <a:avLst/>
@@ -2864,21 +2971,21 @@
           <a:bodyPr wrap="square" lIns="0" tIns="0" rIns="0" bIns="0" rtlCol="0" anchor="ctr"/>
           <a:lstStyle/>
           <a:p>
-            <a:pPr marL="0" indent="0" algn="ctr">
-              <a:buNone/>
-            </a:pPr>
-            <a:r>
-              <a:rPr lang="en-US" sz="2200" dirty="0">
-                <a:solidFill>
-                  <a:srgbClr val="3A3A3C"/>
-                </a:solidFill>
-                <a:latin typeface="Arial" pitchFamily="34" charset="0"/>
-                <a:ea typeface="Arial" pitchFamily="34" charset="-122"/>
-                <a:cs typeface="Arial" pitchFamily="34" charset="-120"/>
-              </a:rPr>
-              <a:t>15 秒完成识别 · 校验 · 审批建议</a:t>
-            </a:r>
-            <a:endParaRPr lang="en-US" sz="2200" dirty="0"/>
+            <a:pPr indent="0" marL="0">
+              <a:buNone/>
+            </a:pPr>
+            <a:r>
+              <a:rPr lang="en-US" sz="1300" dirty="0">
+                <a:solidFill>
+                  <a:srgbClr val="8E8E93"/>
+                </a:solidFill>
+                <a:latin typeface="Arial" pitchFamily="34" charset="0"/>
+                <a:ea typeface="Arial" pitchFamily="34" charset="-122"/>
+                <a:cs typeface="Arial" pitchFamily="34" charset="-120"/>
+              </a:rPr>
+              <a:t>纸质归档，无法统计问题</a:t>
+            </a:r>
+            <a:endParaRPr lang="en-US" sz="1300" dirty="0"/>
           </a:p>
         </p:txBody>
       </p:sp>
@@ -2901,7 +3008,6 @@
         <a:solidFill>
           <a:srgbClr val="F5F5F7"/>
         </a:solidFill>
-        <a:effectLst/>
       </p:bgPr>
     </p:bg>
     <p:spTree>
@@ -2920,14 +3026,448 @@
       </p:grpSpPr>
       <p:sp>
         <p:nvSpPr>
-          <p:cNvPr id="2" name="Text 0"/>
-          <p:cNvSpPr/>
-          <p:nvPr/>
-        </p:nvSpPr>
-        <p:spPr>
-          <a:xfrm>
-            <a:off x="640080" y="502920"/>
-            <a:ext cx="7772400" cy="411480"/>
+          <p:cNvPr id="2" name="Shape 0"/>
+          <p:cNvSpPr/>
+          <p:nvPr/>
+        </p:nvSpPr>
+        <p:spPr>
+          <a:xfrm flipV="1">
+            <a:off x="950976" y="1133856"/>
+            <a:ext cx="1097280" cy="365760"/>
+          </a:xfrm>
+          <a:prstGeom prst="line">
+            <a:avLst/>
+          </a:prstGeom>
+          <a:noFill/>
+          <a:ln w="9525">
+            <a:solidFill>
+              <a:srgbClr val="E5E5EA"/>
+            </a:solidFill>
+            <a:prstDash val="solid"/>
+          </a:ln>
+        </p:spPr>
+      </p:sp>
+      <p:sp>
+        <p:nvSpPr>
+          <p:cNvPr id="3" name="Shape 1"/>
+          <p:cNvSpPr/>
+          <p:nvPr/>
+        </p:nvSpPr>
+        <p:spPr>
+          <a:xfrm>
+            <a:off x="2048256" y="1133856"/>
+            <a:ext cx="731520" cy="731520"/>
+          </a:xfrm>
+          <a:prstGeom prst="line">
+            <a:avLst/>
+          </a:prstGeom>
+          <a:noFill/>
+          <a:ln w="9525">
+            <a:solidFill>
+              <a:srgbClr val="E5E5EA"/>
+            </a:solidFill>
+            <a:prstDash val="solid"/>
+          </a:ln>
+        </p:spPr>
+      </p:sp>
+      <p:sp>
+        <p:nvSpPr>
+          <p:cNvPr id="4" name="Shape 2"/>
+          <p:cNvSpPr/>
+          <p:nvPr/>
+        </p:nvSpPr>
+        <p:spPr>
+          <a:xfrm>
+            <a:off x="950976" y="1499616"/>
+            <a:ext cx="1828800" cy="365760"/>
+          </a:xfrm>
+          <a:prstGeom prst="line">
+            <a:avLst/>
+          </a:prstGeom>
+          <a:noFill/>
+          <a:ln w="9525">
+            <a:solidFill>
+              <a:srgbClr val="E5E5EA"/>
+            </a:solidFill>
+            <a:prstDash val="solid"/>
+          </a:ln>
+        </p:spPr>
+      </p:sp>
+      <p:sp>
+        <p:nvSpPr>
+          <p:cNvPr id="5" name="Shape 3"/>
+          <p:cNvSpPr/>
+          <p:nvPr/>
+        </p:nvSpPr>
+        <p:spPr>
+          <a:xfrm>
+            <a:off x="6437376" y="1408176"/>
+            <a:ext cx="1005840" cy="365760"/>
+          </a:xfrm>
+          <a:prstGeom prst="line">
+            <a:avLst/>
+          </a:prstGeom>
+          <a:noFill/>
+          <a:ln w="9525">
+            <a:solidFill>
+              <a:srgbClr val="E5E5EA"/>
+            </a:solidFill>
+            <a:prstDash val="solid"/>
+          </a:ln>
+        </p:spPr>
+      </p:sp>
+      <p:sp>
+        <p:nvSpPr>
+          <p:cNvPr id="6" name="Shape 4"/>
+          <p:cNvSpPr/>
+          <p:nvPr/>
+        </p:nvSpPr>
+        <p:spPr>
+          <a:xfrm flipV="1">
+            <a:off x="7443216" y="1042416"/>
+            <a:ext cx="640080" cy="731520"/>
+          </a:xfrm>
+          <a:prstGeom prst="line">
+            <a:avLst/>
+          </a:prstGeom>
+          <a:noFill/>
+          <a:ln w="9525">
+            <a:solidFill>
+              <a:srgbClr val="E5E5EA"/>
+            </a:solidFill>
+            <a:prstDash val="solid"/>
+          </a:ln>
+        </p:spPr>
+      </p:sp>
+      <p:sp>
+        <p:nvSpPr>
+          <p:cNvPr id="7" name="Shape 5"/>
+          <p:cNvSpPr/>
+          <p:nvPr/>
+        </p:nvSpPr>
+        <p:spPr>
+          <a:xfrm flipV="1">
+            <a:off x="6437376" y="1042416"/>
+            <a:ext cx="1645920" cy="365760"/>
+          </a:xfrm>
+          <a:prstGeom prst="line">
+            <a:avLst/>
+          </a:prstGeom>
+          <a:noFill/>
+          <a:ln w="9525">
+            <a:solidFill>
+              <a:srgbClr val="E5E5EA"/>
+            </a:solidFill>
+            <a:prstDash val="solid"/>
+          </a:ln>
+        </p:spPr>
+      </p:sp>
+      <p:sp>
+        <p:nvSpPr>
+          <p:cNvPr id="8" name="Shape 6"/>
+          <p:cNvSpPr/>
+          <p:nvPr/>
+        </p:nvSpPr>
+        <p:spPr>
+          <a:xfrm>
+            <a:off x="1408176" y="3511296"/>
+            <a:ext cx="1188720" cy="365760"/>
+          </a:xfrm>
+          <a:prstGeom prst="line">
+            <a:avLst/>
+          </a:prstGeom>
+          <a:noFill/>
+          <a:ln w="9525">
+            <a:solidFill>
+              <a:srgbClr val="E5E5EA"/>
+            </a:solidFill>
+            <a:prstDash val="solid"/>
+          </a:ln>
+        </p:spPr>
+      </p:sp>
+      <p:sp>
+        <p:nvSpPr>
+          <p:cNvPr id="9" name="Shape 7"/>
+          <p:cNvSpPr/>
+          <p:nvPr/>
+        </p:nvSpPr>
+        <p:spPr>
+          <a:xfrm>
+            <a:off x="6894576" y="3602736"/>
+            <a:ext cx="1005840" cy="365760"/>
+          </a:xfrm>
+          <a:prstGeom prst="line">
+            <a:avLst/>
+          </a:prstGeom>
+          <a:noFill/>
+          <a:ln w="9525">
+            <a:solidFill>
+              <a:srgbClr val="E5E5EA"/>
+            </a:solidFill>
+            <a:prstDash val="solid"/>
+          </a:ln>
+        </p:spPr>
+      </p:sp>
+      <p:sp>
+        <p:nvSpPr>
+          <p:cNvPr id="10" name="Shape 8"/>
+          <p:cNvSpPr/>
+          <p:nvPr/>
+        </p:nvSpPr>
+        <p:spPr>
+          <a:xfrm>
+            <a:off x="914400" y="1463040"/>
+            <a:ext cx="82296" cy="82296"/>
+          </a:xfrm>
+          <a:prstGeom prst="rect">
+            <a:avLst/>
+          </a:prstGeom>
+          <a:solidFill>
+            <a:srgbClr val="8E8E93"/>
+          </a:solidFill>
+          <a:ln w="12700">
+            <a:solidFill>
+              <a:srgbClr val="8E8E93"/>
+            </a:solidFill>
+            <a:prstDash val="solid"/>
+          </a:ln>
+        </p:spPr>
+      </p:sp>
+      <p:sp>
+        <p:nvSpPr>
+          <p:cNvPr id="11" name="Shape 9"/>
+          <p:cNvSpPr/>
+          <p:nvPr/>
+        </p:nvSpPr>
+        <p:spPr>
+          <a:xfrm>
+            <a:off x="2011680" y="1097280"/>
+            <a:ext cx="64008" cy="64008"/>
+          </a:xfrm>
+          <a:prstGeom prst="rect">
+            <a:avLst/>
+          </a:prstGeom>
+          <a:solidFill>
+            <a:srgbClr val="C7C7CC"/>
+          </a:solidFill>
+          <a:ln w="12700">
+            <a:solidFill>
+              <a:srgbClr val="C7C7CC"/>
+            </a:solidFill>
+            <a:prstDash val="solid"/>
+          </a:ln>
+        </p:spPr>
+      </p:sp>
+      <p:sp>
+        <p:nvSpPr>
+          <p:cNvPr id="12" name="Shape 10"/>
+          <p:cNvSpPr/>
+          <p:nvPr/>
+        </p:nvSpPr>
+        <p:spPr>
+          <a:xfrm>
+            <a:off x="2743200" y="1828800"/>
+            <a:ext cx="54864" cy="54864"/>
+          </a:xfrm>
+          <a:prstGeom prst="rect">
+            <a:avLst/>
+          </a:prstGeom>
+          <a:solidFill>
+            <a:srgbClr val="AEAEB2"/>
+          </a:solidFill>
+          <a:ln w="12700">
+            <a:solidFill>
+              <a:srgbClr val="AEAEB2"/>
+            </a:solidFill>
+            <a:prstDash val="solid"/>
+          </a:ln>
+        </p:spPr>
+      </p:sp>
+      <p:sp>
+        <p:nvSpPr>
+          <p:cNvPr id="13" name="Shape 11"/>
+          <p:cNvSpPr/>
+          <p:nvPr/>
+        </p:nvSpPr>
+        <p:spPr>
+          <a:xfrm>
+            <a:off x="6400800" y="1371600"/>
+            <a:ext cx="73152" cy="73152"/>
+          </a:xfrm>
+          <a:prstGeom prst="rect">
+            <a:avLst/>
+          </a:prstGeom>
+          <a:solidFill>
+            <a:srgbClr val="8E8E93"/>
+          </a:solidFill>
+          <a:ln w="12700">
+            <a:solidFill>
+              <a:srgbClr val="8E8E93"/>
+            </a:solidFill>
+            <a:prstDash val="solid"/>
+          </a:ln>
+        </p:spPr>
+      </p:sp>
+      <p:sp>
+        <p:nvSpPr>
+          <p:cNvPr id="14" name="Shape 12"/>
+          <p:cNvSpPr/>
+          <p:nvPr/>
+        </p:nvSpPr>
+        <p:spPr>
+          <a:xfrm>
+            <a:off x="7406640" y="1737360"/>
+            <a:ext cx="54864" cy="54864"/>
+          </a:xfrm>
+          <a:prstGeom prst="rect">
+            <a:avLst/>
+          </a:prstGeom>
+          <a:solidFill>
+            <a:srgbClr val="C7C7CC"/>
+          </a:solidFill>
+          <a:ln w="12700">
+            <a:solidFill>
+              <a:srgbClr val="C7C7CC"/>
+            </a:solidFill>
+            <a:prstDash val="solid"/>
+          </a:ln>
+        </p:spPr>
+      </p:sp>
+      <p:sp>
+        <p:nvSpPr>
+          <p:cNvPr id="15" name="Shape 13"/>
+          <p:cNvSpPr/>
+          <p:nvPr/>
+        </p:nvSpPr>
+        <p:spPr>
+          <a:xfrm>
+            <a:off x="8046720" y="1005840"/>
+            <a:ext cx="64008" cy="64008"/>
+          </a:xfrm>
+          <a:prstGeom prst="rect">
+            <a:avLst/>
+          </a:prstGeom>
+          <a:solidFill>
+            <a:srgbClr val="AEAEB2"/>
+          </a:solidFill>
+          <a:ln w="12700">
+            <a:solidFill>
+              <a:srgbClr val="AEAEB2"/>
+            </a:solidFill>
+            <a:prstDash val="solid"/>
+          </a:ln>
+        </p:spPr>
+      </p:sp>
+      <p:sp>
+        <p:nvSpPr>
+          <p:cNvPr id="16" name="Shape 14"/>
+          <p:cNvSpPr/>
+          <p:nvPr/>
+        </p:nvSpPr>
+        <p:spPr>
+          <a:xfrm>
+            <a:off x="1371600" y="3474720"/>
+            <a:ext cx="64008" cy="64008"/>
+          </a:xfrm>
+          <a:prstGeom prst="rect">
+            <a:avLst/>
+          </a:prstGeom>
+          <a:solidFill>
+            <a:srgbClr val="C7C7CC"/>
+          </a:solidFill>
+          <a:ln w="12700">
+            <a:solidFill>
+              <a:srgbClr val="C7C7CC"/>
+            </a:solidFill>
+            <a:prstDash val="solid"/>
+          </a:ln>
+        </p:spPr>
+      </p:sp>
+      <p:sp>
+        <p:nvSpPr>
+          <p:cNvPr id="17" name="Shape 15"/>
+          <p:cNvSpPr/>
+          <p:nvPr/>
+        </p:nvSpPr>
+        <p:spPr>
+          <a:xfrm>
+            <a:off x="2560320" y="3840480"/>
+            <a:ext cx="45720" cy="45720"/>
+          </a:xfrm>
+          <a:prstGeom prst="rect">
+            <a:avLst/>
+          </a:prstGeom>
+          <a:solidFill>
+            <a:srgbClr val="D1D1D6"/>
+          </a:solidFill>
+          <a:ln w="12700">
+            <a:solidFill>
+              <a:srgbClr val="D1D1D6"/>
+            </a:solidFill>
+            <a:prstDash val="solid"/>
+          </a:ln>
+        </p:spPr>
+      </p:sp>
+      <p:sp>
+        <p:nvSpPr>
+          <p:cNvPr id="18" name="Shape 16"/>
+          <p:cNvSpPr/>
+          <p:nvPr/>
+        </p:nvSpPr>
+        <p:spPr>
+          <a:xfrm>
+            <a:off x="6858000" y="3566160"/>
+            <a:ext cx="73152" cy="73152"/>
+          </a:xfrm>
+          <a:prstGeom prst="rect">
+            <a:avLst/>
+          </a:prstGeom>
+          <a:solidFill>
+            <a:srgbClr val="8E8E93"/>
+          </a:solidFill>
+          <a:ln w="12700">
+            <a:solidFill>
+              <a:srgbClr val="8E8E93"/>
+            </a:solidFill>
+            <a:prstDash val="solid"/>
+          </a:ln>
+        </p:spPr>
+      </p:sp>
+      <p:sp>
+        <p:nvSpPr>
+          <p:cNvPr id="19" name="Shape 17"/>
+          <p:cNvSpPr/>
+          <p:nvPr/>
+        </p:nvSpPr>
+        <p:spPr>
+          <a:xfrm>
+            <a:off x="7863840" y="3931920"/>
+            <a:ext cx="54864" cy="54864"/>
+          </a:xfrm>
+          <a:prstGeom prst="rect">
+            <a:avLst/>
+          </a:prstGeom>
+          <a:solidFill>
+            <a:srgbClr val="C7C7CC"/>
+          </a:solidFill>
+          <a:ln w="12700">
+            <a:solidFill>
+              <a:srgbClr val="C7C7CC"/>
+            </a:solidFill>
+            <a:prstDash val="solid"/>
+          </a:ln>
+        </p:spPr>
+      </p:sp>
+      <p:sp>
+        <p:nvSpPr>
+          <p:cNvPr id="20" name="Text 18"/>
+          <p:cNvSpPr/>
+          <p:nvPr/>
+        </p:nvSpPr>
+        <p:spPr>
+          <a:xfrm>
+            <a:off x="731520" y="2057400"/>
+            <a:ext cx="7680960" cy="411480"/>
           </a:xfrm>
           <a:prstGeom prst="rect">
             <a:avLst/>
@@ -2939,7 +3479,7 @@
           <a:bodyPr wrap="square" lIns="0" tIns="0" rIns="0" bIns="0" rtlCol="0" anchor="ctr"/>
           <a:lstStyle/>
           <a:p>
-            <a:pPr marL="0" indent="0">
+            <a:pPr algn="ctr" indent="0" marL="0">
               <a:buNone/>
             </a:pPr>
             <a:r>
@@ -2951,7 +3491,7 @@
                 <a:ea typeface="Arial" pitchFamily="34" charset="-122"/>
                 <a:cs typeface="Arial" pitchFamily="34" charset="-120"/>
               </a:rPr>
-              <a:t>一线痛点。</a:t>
+              <a:t>拍照一张带气作业票</a:t>
             </a:r>
             <a:endParaRPr lang="en-US" sz="2800" dirty="0"/>
           </a:p>
@@ -2959,85 +3499,14 @@
       </p:sp>
       <p:sp>
         <p:nvSpPr>
-          <p:cNvPr id="3" name="Shape 1"/>
-          <p:cNvSpPr/>
-          <p:nvPr/>
-        </p:nvSpPr>
-        <p:spPr>
-          <a:xfrm>
-            <a:off x="640080" y="1371600"/>
-            <a:ext cx="1874520" cy="2194560"/>
-          </a:xfrm>
-          <a:prstGeom prst="rect">
-            <a:avLst/>
-          </a:prstGeom>
-          <a:solidFill>
-            <a:srgbClr val="FFFFFF"/>
-          </a:solidFill>
-          <a:ln w="12700">
-            <a:solidFill>
-              <a:srgbClr val="FFFFFF"/>
-            </a:solidFill>
-            <a:prstDash val="solid"/>
-          </a:ln>
-          <a:effectLst>
-            <a:outerShdw blurRad="228600" dist="50800" dir="8100000" algn="bl" rotWithShape="0">
-              <a:srgbClr val="000000">
-                <a:alpha val="6000"/>
-              </a:srgbClr>
-            </a:outerShdw>
-          </a:effectLst>
-        </p:spPr>
-        <p:txBody>
-          <a:bodyPr/>
-          <a:lstStyle/>
-          <a:p>
-            <a:endParaRPr lang="zh-CN" altLang="en-US"/>
-          </a:p>
-        </p:txBody>
-      </p:sp>
-      <p:sp>
-        <p:nvSpPr>
-          <p:cNvPr id="4" name="Shape 2"/>
-          <p:cNvSpPr/>
-          <p:nvPr/>
-        </p:nvSpPr>
-        <p:spPr>
-          <a:xfrm>
-            <a:off x="804672" y="1600200"/>
-            <a:ext cx="109728" cy="109728"/>
-          </a:xfrm>
-          <a:prstGeom prst="rect">
-            <a:avLst/>
-          </a:prstGeom>
-          <a:solidFill>
-            <a:srgbClr val="5B8DEF"/>
-          </a:solidFill>
-          <a:ln w="12700">
-            <a:solidFill>
-              <a:srgbClr val="5B8DEF"/>
-            </a:solidFill>
-            <a:prstDash val="solid"/>
-          </a:ln>
-        </p:spPr>
-        <p:txBody>
-          <a:bodyPr/>
-          <a:lstStyle/>
-          <a:p>
-            <a:endParaRPr lang="zh-CN" altLang="en-US"/>
-          </a:p>
-        </p:txBody>
-      </p:sp>
-      <p:sp>
-        <p:nvSpPr>
-          <p:cNvPr id="5" name="Text 3"/>
-          <p:cNvSpPr/>
-          <p:nvPr/>
-        </p:nvSpPr>
-        <p:spPr>
-          <a:xfrm>
-            <a:off x="804672" y="1965960"/>
-            <a:ext cx="1554480" cy="457200"/>
+          <p:cNvPr id="21" name="Text 19"/>
+          <p:cNvSpPr/>
+          <p:nvPr/>
+        </p:nvSpPr>
+        <p:spPr>
+          <a:xfrm>
+            <a:off x="731520" y="2606040"/>
+            <a:ext cx="7680960" cy="365760"/>
           </a:xfrm>
           <a:prstGeom prst="rect">
             <a:avLst/>
@@ -3049,524 +3518,21 @@
           <a:bodyPr wrap="square" lIns="0" tIns="0" rIns="0" bIns="0" rtlCol="0" anchor="ctr"/>
           <a:lstStyle/>
           <a:p>
-            <a:pPr marL="0" indent="0">
-              <a:buNone/>
-            </a:pPr>
-            <a:r>
-              <a:rPr lang="en-US" sz="2000" b="1" dirty="0">
-                <a:solidFill>
-                  <a:srgbClr val="111111"/>
-                </a:solidFill>
-                <a:latin typeface="Arial" pitchFamily="34" charset="0"/>
-                <a:ea typeface="Arial" pitchFamily="34" charset="-122"/>
-                <a:cs typeface="Arial" pitchFamily="34" charset="-120"/>
-              </a:rPr>
-              <a:t>10 分钟</a:t>
-            </a:r>
-            <a:endParaRPr lang="en-US" sz="2000" dirty="0"/>
-          </a:p>
-        </p:txBody>
-      </p:sp>
-      <p:sp>
-        <p:nvSpPr>
-          <p:cNvPr id="6" name="Text 4"/>
-          <p:cNvSpPr/>
-          <p:nvPr/>
-        </p:nvSpPr>
-        <p:spPr>
-          <a:xfrm>
-            <a:off x="804672" y="2514600"/>
-            <a:ext cx="1554480" cy="731520"/>
-          </a:xfrm>
-          <a:prstGeom prst="rect">
-            <a:avLst/>
-          </a:prstGeom>
-          <a:noFill/>
-          <a:ln/>
-        </p:spPr>
-        <p:txBody>
-          <a:bodyPr wrap="square" lIns="0" tIns="0" rIns="0" bIns="0" rtlCol="0" anchor="ctr"/>
-          <a:lstStyle/>
-          <a:p>
-            <a:pPr marL="0" indent="0">
-              <a:buNone/>
-            </a:pPr>
-            <a:r>
-              <a:rPr lang="en-US" sz="1300" dirty="0">
-                <a:solidFill>
-                  <a:srgbClr val="8E8E93"/>
-                </a:solidFill>
-                <a:latin typeface="Arial" pitchFamily="34" charset="0"/>
-                <a:ea typeface="Arial" pitchFamily="34" charset="-122"/>
-                <a:cs typeface="Arial" pitchFamily="34" charset="-120"/>
-              </a:rPr>
-              <a:t>单票人工传递</a:t>
-            </a:r>
-            <a:endParaRPr lang="en-US" sz="1300" dirty="0"/>
-          </a:p>
-        </p:txBody>
-      </p:sp>
-      <p:sp>
-        <p:nvSpPr>
-          <p:cNvPr id="7" name="Shape 5"/>
-          <p:cNvSpPr/>
-          <p:nvPr/>
-        </p:nvSpPr>
-        <p:spPr>
-          <a:xfrm>
-            <a:off x="2743200" y="1371600"/>
-            <a:ext cx="1874520" cy="2194560"/>
-          </a:xfrm>
-          <a:prstGeom prst="rect">
-            <a:avLst/>
-          </a:prstGeom>
-          <a:solidFill>
-            <a:srgbClr val="FFFFFF"/>
-          </a:solidFill>
-          <a:ln w="12700">
-            <a:solidFill>
-              <a:srgbClr val="FFFFFF"/>
-            </a:solidFill>
-            <a:prstDash val="solid"/>
-          </a:ln>
-          <a:effectLst>
-            <a:outerShdw blurRad="228600" dist="50800" dir="8100000" algn="bl" rotWithShape="0">
-              <a:srgbClr val="000000">
-                <a:alpha val="6000"/>
-              </a:srgbClr>
-            </a:outerShdw>
-          </a:effectLst>
-        </p:spPr>
-        <p:txBody>
-          <a:bodyPr/>
-          <a:lstStyle/>
-          <a:p>
-            <a:endParaRPr lang="zh-CN" altLang="en-US"/>
-          </a:p>
-        </p:txBody>
-      </p:sp>
-      <p:sp>
-        <p:nvSpPr>
-          <p:cNvPr id="8" name="Shape 6"/>
-          <p:cNvSpPr/>
-          <p:nvPr/>
-        </p:nvSpPr>
-        <p:spPr>
-          <a:xfrm>
-            <a:off x="2907792" y="1600200"/>
-            <a:ext cx="109728" cy="109728"/>
-          </a:xfrm>
-          <a:prstGeom prst="rect">
-            <a:avLst/>
-          </a:prstGeom>
-          <a:solidFill>
-            <a:srgbClr val="C7C7CC"/>
-          </a:solidFill>
-          <a:ln w="12700">
-            <a:solidFill>
-              <a:srgbClr val="C7C7CC"/>
-            </a:solidFill>
-            <a:prstDash val="solid"/>
-          </a:ln>
-        </p:spPr>
-        <p:txBody>
-          <a:bodyPr/>
-          <a:lstStyle/>
-          <a:p>
-            <a:endParaRPr lang="zh-CN" altLang="en-US"/>
-          </a:p>
-        </p:txBody>
-      </p:sp>
-      <p:sp>
-        <p:nvSpPr>
-          <p:cNvPr id="9" name="Text 7"/>
-          <p:cNvSpPr/>
-          <p:nvPr/>
-        </p:nvSpPr>
-        <p:spPr>
-          <a:xfrm>
-            <a:off x="2907792" y="1965960"/>
-            <a:ext cx="1554480" cy="457200"/>
-          </a:xfrm>
-          <a:prstGeom prst="rect">
-            <a:avLst/>
-          </a:prstGeom>
-          <a:noFill/>
-          <a:ln/>
-        </p:spPr>
-        <p:txBody>
-          <a:bodyPr wrap="square" lIns="0" tIns="0" rIns="0" bIns="0" rtlCol="0" anchor="ctr"/>
-          <a:lstStyle/>
-          <a:p>
-            <a:pPr marL="0" indent="0">
-              <a:buNone/>
-            </a:pPr>
-            <a:r>
-              <a:rPr lang="en-US" sz="2000" b="1" dirty="0">
-                <a:solidFill>
-                  <a:srgbClr val="111111"/>
-                </a:solidFill>
-                <a:latin typeface="Arial" pitchFamily="34" charset="0"/>
-                <a:ea typeface="Arial" pitchFamily="34" charset="-122"/>
-                <a:cs typeface="Arial" pitchFamily="34" charset="-120"/>
-              </a:rPr>
-              <a:t>易漏检</a:t>
-            </a:r>
-            <a:endParaRPr lang="en-US" sz="2000" dirty="0"/>
-          </a:p>
-        </p:txBody>
-      </p:sp>
-      <p:sp>
-        <p:nvSpPr>
-          <p:cNvPr id="10" name="Text 8"/>
-          <p:cNvSpPr/>
-          <p:nvPr/>
-        </p:nvSpPr>
-        <p:spPr>
-          <a:xfrm>
-            <a:off x="2907792" y="2514600"/>
-            <a:ext cx="1554480" cy="731520"/>
-          </a:xfrm>
-          <a:prstGeom prst="rect">
-            <a:avLst/>
-          </a:prstGeom>
-          <a:noFill/>
-          <a:ln/>
-        </p:spPr>
-        <p:txBody>
-          <a:bodyPr wrap="square" lIns="0" tIns="0" rIns="0" bIns="0" rtlCol="0" anchor="ctr"/>
-          <a:lstStyle/>
-          <a:p>
-            <a:pPr marL="0" indent="0">
-              <a:buNone/>
-            </a:pPr>
-            <a:r>
-              <a:rPr lang="en-US" sz="1300" dirty="0">
-                <a:solidFill>
-                  <a:srgbClr val="8E8E93"/>
-                </a:solidFill>
-                <a:latin typeface="Arial" pitchFamily="34" charset="0"/>
-                <a:ea typeface="Arial" pitchFamily="34" charset="-122"/>
-                <a:cs typeface="Arial" pitchFamily="34" charset="-120"/>
-              </a:rPr>
-              <a:t>25 项措施 × 5 列确认</a:t>
-            </a:r>
-            <a:endParaRPr lang="en-US" sz="1300" dirty="0"/>
-          </a:p>
-        </p:txBody>
-      </p:sp>
-      <p:sp>
-        <p:nvSpPr>
-          <p:cNvPr id="11" name="Shape 9"/>
-          <p:cNvSpPr/>
-          <p:nvPr/>
-        </p:nvSpPr>
-        <p:spPr>
-          <a:xfrm>
-            <a:off x="4846320" y="1371600"/>
-            <a:ext cx="1874520" cy="2194560"/>
-          </a:xfrm>
-          <a:prstGeom prst="rect">
-            <a:avLst/>
-          </a:prstGeom>
-          <a:solidFill>
-            <a:srgbClr val="FFFFFF"/>
-          </a:solidFill>
-          <a:ln w="12700">
-            <a:solidFill>
-              <a:srgbClr val="FFFFFF"/>
-            </a:solidFill>
-            <a:prstDash val="solid"/>
-          </a:ln>
-          <a:effectLst>
-            <a:outerShdw blurRad="228600" dist="50800" dir="8100000" algn="bl" rotWithShape="0">
-              <a:srgbClr val="000000">
-                <a:alpha val="6000"/>
-              </a:srgbClr>
-            </a:outerShdw>
-          </a:effectLst>
-        </p:spPr>
-        <p:txBody>
-          <a:bodyPr/>
-          <a:lstStyle/>
-          <a:p>
-            <a:endParaRPr lang="zh-CN" altLang="en-US"/>
-          </a:p>
-        </p:txBody>
-      </p:sp>
-      <p:sp>
-        <p:nvSpPr>
-          <p:cNvPr id="12" name="Shape 10"/>
-          <p:cNvSpPr/>
-          <p:nvPr/>
-        </p:nvSpPr>
-        <p:spPr>
-          <a:xfrm>
-            <a:off x="5010912" y="1600200"/>
-            <a:ext cx="109728" cy="109728"/>
-          </a:xfrm>
-          <a:prstGeom prst="rect">
-            <a:avLst/>
-          </a:prstGeom>
-          <a:solidFill>
-            <a:srgbClr val="C7C7CC"/>
-          </a:solidFill>
-          <a:ln w="12700">
-            <a:solidFill>
-              <a:srgbClr val="C7C7CC"/>
-            </a:solidFill>
-            <a:prstDash val="solid"/>
-          </a:ln>
-        </p:spPr>
-        <p:txBody>
-          <a:bodyPr/>
-          <a:lstStyle/>
-          <a:p>
-            <a:endParaRPr lang="zh-CN" altLang="en-US"/>
-          </a:p>
-        </p:txBody>
-      </p:sp>
-      <p:sp>
-        <p:nvSpPr>
-          <p:cNvPr id="13" name="Text 11"/>
-          <p:cNvSpPr/>
-          <p:nvPr/>
-        </p:nvSpPr>
-        <p:spPr>
-          <a:xfrm>
-            <a:off x="5010912" y="1965960"/>
-            <a:ext cx="1554480" cy="457200"/>
-          </a:xfrm>
-          <a:prstGeom prst="rect">
-            <a:avLst/>
-          </a:prstGeom>
-          <a:noFill/>
-          <a:ln/>
-        </p:spPr>
-        <p:txBody>
-          <a:bodyPr wrap="square" lIns="0" tIns="0" rIns="0" bIns="0" rtlCol="0" anchor="ctr"/>
-          <a:lstStyle/>
-          <a:p>
-            <a:pPr marL="0" indent="0">
-              <a:buNone/>
-            </a:pPr>
-            <a:r>
-              <a:rPr lang="en-US" sz="2000" b="1" dirty="0">
-                <a:solidFill>
-                  <a:srgbClr val="111111"/>
-                </a:solidFill>
-                <a:latin typeface="Arial" pitchFamily="34" charset="0"/>
-                <a:ea typeface="Arial" pitchFamily="34" charset="-122"/>
-                <a:cs typeface="Arial" pitchFamily="34" charset="-120"/>
-              </a:rPr>
-              <a:t>人工审核</a:t>
-            </a:r>
-            <a:endParaRPr lang="en-US" sz="2000" dirty="0"/>
-          </a:p>
-        </p:txBody>
-      </p:sp>
-      <p:sp>
-        <p:nvSpPr>
-          <p:cNvPr id="14" name="Text 12"/>
-          <p:cNvSpPr/>
-          <p:nvPr/>
-        </p:nvSpPr>
-        <p:spPr>
-          <a:xfrm>
-            <a:off x="5010912" y="2514600"/>
-            <a:ext cx="1554480" cy="731520"/>
-          </a:xfrm>
-          <a:prstGeom prst="rect">
-            <a:avLst/>
-          </a:prstGeom>
-          <a:noFill/>
-          <a:ln/>
-        </p:spPr>
-        <p:txBody>
-          <a:bodyPr wrap="square" lIns="0" tIns="0" rIns="0" bIns="0" rtlCol="0" anchor="ctr"/>
-          <a:lstStyle/>
-          <a:p>
-            <a:pPr marL="0" indent="0">
-              <a:buNone/>
-            </a:pPr>
-            <a:r>
-              <a:rPr lang="en-US" sz="1300" dirty="0">
-                <a:solidFill>
-                  <a:srgbClr val="8E8E93"/>
-                </a:solidFill>
-                <a:latin typeface="Arial" pitchFamily="34" charset="0"/>
-                <a:ea typeface="Arial" pitchFamily="34" charset="-122"/>
-                <a:cs typeface="Arial" pitchFamily="34" charset="-120"/>
-              </a:rPr>
-              <a:t>审批凭人工经验，</a:t>
-            </a:r>
-            <a:endParaRPr lang="en-US" sz="1300" dirty="0"/>
-          </a:p>
-          <a:p>
-            <a:pPr marL="0" indent="0">
-              <a:buNone/>
-            </a:pPr>
-            <a:r>
-              <a:rPr lang="en-US" sz="1300" dirty="0">
-                <a:solidFill>
-                  <a:srgbClr val="8E8E93"/>
-                </a:solidFill>
-                <a:latin typeface="Arial" pitchFamily="34" charset="0"/>
-                <a:ea typeface="Arial" pitchFamily="34" charset="-122"/>
-                <a:cs typeface="Arial" pitchFamily="34" charset="-120"/>
-              </a:rPr>
-              <a:t>自动化审核更规范</a:t>
-            </a:r>
-            <a:endParaRPr lang="en-US" sz="1300" dirty="0"/>
-          </a:p>
-        </p:txBody>
-      </p:sp>
-      <p:sp>
-        <p:nvSpPr>
-          <p:cNvPr id="15" name="Shape 13"/>
-          <p:cNvSpPr/>
-          <p:nvPr/>
-        </p:nvSpPr>
-        <p:spPr>
-          <a:xfrm>
-            <a:off x="6949440" y="1371600"/>
-            <a:ext cx="1874520" cy="2194560"/>
-          </a:xfrm>
-          <a:prstGeom prst="rect">
-            <a:avLst/>
-          </a:prstGeom>
-          <a:solidFill>
-            <a:srgbClr val="FFFFFF"/>
-          </a:solidFill>
-          <a:ln w="12700">
-            <a:solidFill>
-              <a:srgbClr val="FFFFFF"/>
-            </a:solidFill>
-            <a:prstDash val="solid"/>
-          </a:ln>
-          <a:effectLst>
-            <a:outerShdw blurRad="228600" dist="50800" dir="8100000" algn="bl" rotWithShape="0">
-              <a:srgbClr val="000000">
-                <a:alpha val="6000"/>
-              </a:srgbClr>
-            </a:outerShdw>
-          </a:effectLst>
-        </p:spPr>
-        <p:txBody>
-          <a:bodyPr/>
-          <a:lstStyle/>
-          <a:p>
-            <a:endParaRPr lang="zh-CN" altLang="en-US"/>
-          </a:p>
-        </p:txBody>
-      </p:sp>
-      <p:sp>
-        <p:nvSpPr>
-          <p:cNvPr id="16" name="Shape 14"/>
-          <p:cNvSpPr/>
-          <p:nvPr/>
-        </p:nvSpPr>
-        <p:spPr>
-          <a:xfrm>
-            <a:off x="7114032" y="1600200"/>
-            <a:ext cx="109728" cy="109728"/>
-          </a:xfrm>
-          <a:prstGeom prst="rect">
-            <a:avLst/>
-          </a:prstGeom>
-          <a:solidFill>
-            <a:srgbClr val="C7C7CC"/>
-          </a:solidFill>
-          <a:ln w="12700">
-            <a:solidFill>
-              <a:srgbClr val="C7C7CC"/>
-            </a:solidFill>
-            <a:prstDash val="solid"/>
-          </a:ln>
-        </p:spPr>
-        <p:txBody>
-          <a:bodyPr/>
-          <a:lstStyle/>
-          <a:p>
-            <a:endParaRPr lang="zh-CN" altLang="en-US"/>
-          </a:p>
-        </p:txBody>
-      </p:sp>
-      <p:sp>
-        <p:nvSpPr>
-          <p:cNvPr id="17" name="Text 15"/>
-          <p:cNvSpPr/>
-          <p:nvPr/>
-        </p:nvSpPr>
-        <p:spPr>
-          <a:xfrm>
-            <a:off x="7114032" y="1965960"/>
-            <a:ext cx="1554480" cy="457200"/>
-          </a:xfrm>
-          <a:prstGeom prst="rect">
-            <a:avLst/>
-          </a:prstGeom>
-          <a:noFill/>
-          <a:ln/>
-        </p:spPr>
-        <p:txBody>
-          <a:bodyPr wrap="square" lIns="0" tIns="0" rIns="0" bIns="0" rtlCol="0" anchor="ctr"/>
-          <a:lstStyle/>
-          <a:p>
-            <a:pPr marL="0" indent="0">
-              <a:buNone/>
-            </a:pPr>
-            <a:r>
-              <a:rPr lang="en-US" sz="2000" b="1" dirty="0">
-                <a:solidFill>
-                  <a:srgbClr val="111111"/>
-                </a:solidFill>
-                <a:latin typeface="Arial" pitchFamily="34" charset="0"/>
-                <a:ea typeface="Arial" pitchFamily="34" charset="-122"/>
-                <a:cs typeface="Arial" pitchFamily="34" charset="-120"/>
-              </a:rPr>
-              <a:t>数据沉睡</a:t>
-            </a:r>
-            <a:endParaRPr lang="en-US" sz="2000" dirty="0"/>
-          </a:p>
-        </p:txBody>
-      </p:sp>
-      <p:sp>
-        <p:nvSpPr>
-          <p:cNvPr id="18" name="Text 16"/>
-          <p:cNvSpPr/>
-          <p:nvPr/>
-        </p:nvSpPr>
-        <p:spPr>
-          <a:xfrm>
-            <a:off x="7114032" y="2514600"/>
-            <a:ext cx="1554480" cy="731520"/>
-          </a:xfrm>
-          <a:prstGeom prst="rect">
-            <a:avLst/>
-          </a:prstGeom>
-          <a:noFill/>
-          <a:ln/>
-        </p:spPr>
-        <p:txBody>
-          <a:bodyPr wrap="square" lIns="0" tIns="0" rIns="0" bIns="0" rtlCol="0" anchor="ctr"/>
-          <a:lstStyle/>
-          <a:p>
-            <a:pPr marL="0" indent="0">
-              <a:buNone/>
-            </a:pPr>
-            <a:r>
-              <a:rPr lang="en-US" sz="1300" dirty="0">
-                <a:solidFill>
-                  <a:srgbClr val="8E8E93"/>
-                </a:solidFill>
-                <a:latin typeface="Arial" pitchFamily="34" charset="0"/>
-                <a:ea typeface="Arial" pitchFamily="34" charset="-122"/>
-                <a:cs typeface="Arial" pitchFamily="34" charset="-120"/>
-              </a:rPr>
-              <a:t>纸质归档，无法统计隐患</a:t>
-            </a:r>
-            <a:endParaRPr lang="en-US" sz="1300" dirty="0"/>
+            <a:pPr algn="ctr" indent="0" marL="0">
+              <a:buNone/>
+            </a:pPr>
+            <a:r>
+              <a:rPr lang="en-US" sz="2200" dirty="0">
+                <a:solidFill>
+                  <a:srgbClr val="3A3A3C"/>
+                </a:solidFill>
+                <a:latin typeface="Arial" pitchFamily="34" charset="0"/>
+                <a:ea typeface="Arial" pitchFamily="34" charset="-122"/>
+                <a:cs typeface="Arial" pitchFamily="34" charset="-120"/>
+              </a:rPr>
+              <a:t>60 秒完成识别 · 校验 · 审批建议</a:t>
+            </a:r>
+            <a:endParaRPr lang="en-US" sz="2200" dirty="0"/>
           </a:p>
         </p:txBody>
       </p:sp>
@@ -3589,7 +3555,6 @@
         <a:solidFill>
           <a:srgbClr val="F5F5F7"/>
         </a:solidFill>
-        <a:effectLst/>
       </p:bgPr>
     </p:bg>
     <p:spTree>
@@ -3627,7 +3592,7 @@
           <a:bodyPr wrap="square" lIns="0" tIns="0" rIns="0" bIns="0" rtlCol="0" anchor="ctr"/>
           <a:lstStyle/>
           <a:p>
-            <a:pPr marL="0" indent="0" algn="ctr">
+            <a:pPr algn="ctr" indent="0" marL="0">
               <a:buNone/>
             </a:pPr>
             <a:r>
@@ -3639,7 +3604,7 @@
                 <a:ea typeface="Arial" pitchFamily="34" charset="-122"/>
                 <a:cs typeface="Arial" pitchFamily="34" charset="-120"/>
               </a:rPr>
-              <a:t>一句话，跑通全流程。</a:t>
+              <a:t>自动化跑通全流程。</a:t>
             </a:r>
             <a:endParaRPr lang="en-US" sz="2600" dirty="0"/>
           </a:p>
@@ -3671,20 +3636,13 @@
             <a:prstDash val="solid"/>
           </a:ln>
           <a:effectLst>
-            <a:outerShdw blurRad="304800" dist="76200" dir="8100000" algn="bl" rotWithShape="0">
+            <a:outerShdw sx="100000" sy="100000" kx="0" ky="0" algn="bl" rotWithShape="0" blurRad="304800" dist="76200" dir="8100000">
               <a:srgbClr val="000000">
                 <a:alpha val="8000"/>
               </a:srgbClr>
             </a:outerShdw>
           </a:effectLst>
         </p:spPr>
-        <p:txBody>
-          <a:bodyPr/>
-          <a:lstStyle/>
-          <a:p>
-            <a:endParaRPr lang="zh-CN" altLang="en-US"/>
-          </a:p>
-        </p:txBody>
       </p:sp>
       <p:sp>
         <p:nvSpPr>
@@ -3707,7 +3665,7 @@
           <a:bodyPr wrap="square" lIns="0" tIns="0" rIns="0" bIns="0" rtlCol="0" anchor="ctr"/>
           <a:lstStyle/>
           <a:p>
-            <a:pPr marL="0" indent="0">
+            <a:pPr indent="0" marL="0">
               <a:buNone/>
             </a:pPr>
             <a:r>
@@ -3721,6 +3679,9 @@
               </a:rPr>
               <a:t>+  </a:t>
             </a:r>
+            <a:pPr indent="0" marL="0">
+              <a:buNone/>
+            </a:pPr>
             <a:r>
               <a:rPr lang="en-US" sz="1500" dirty="0">
                 <a:solidFill>
@@ -3757,7 +3718,7 @@
           <a:bodyPr wrap="square" lIns="0" tIns="0" rIns="0" bIns="0" rtlCol="0" anchor="ctr"/>
           <a:lstStyle/>
           <a:p>
-            <a:pPr marL="0" indent="0" algn="r">
+            <a:pPr algn="r" indent="0" marL="0">
               <a:buNone/>
             </a:pPr>
             <a:r>
@@ -3799,13 +3760,6 @@
             <a:prstDash val="solid"/>
           </a:ln>
         </p:spPr>
-        <p:txBody>
-          <a:bodyPr/>
-          <a:lstStyle/>
-          <a:p>
-            <a:endParaRPr lang="zh-CN" altLang="en-US"/>
-          </a:p>
-        </p:txBody>
       </p:sp>
       <p:sp>
         <p:nvSpPr>
@@ -3828,7 +3782,7 @@
           <a:bodyPr wrap="square" lIns="0" tIns="0" rIns="0" bIns="0" rtlCol="0" anchor="ctr"/>
           <a:lstStyle/>
           <a:p>
-            <a:pPr marL="0" indent="0" algn="ctr">
+            <a:pPr algn="ctr" indent="0" marL="0">
               <a:buNone/>
             </a:pPr>
             <a:r>
@@ -3867,7 +3821,7 @@
           <a:bodyPr wrap="square" lIns="0" tIns="0" rIns="0" bIns="0" rtlCol="0" anchor="ctr"/>
           <a:lstStyle/>
           <a:p>
-            <a:pPr marL="0" indent="0" algn="ctr">
+            <a:pPr algn="ctr" indent="0" marL="0">
               <a:buNone/>
             </a:pPr>
             <a:r>
@@ -3904,7 +3858,6 @@
         <a:solidFill>
           <a:srgbClr val="F5F5F7"/>
         </a:solidFill>
-        <a:effectLst/>
       </p:bgPr>
     </p:bg>
     <p:spTree>
@@ -3947,20 +3900,13 @@
             <a:prstDash val="solid"/>
           </a:ln>
           <a:effectLst>
-            <a:outerShdw blurRad="304800" dist="76200" dir="8100000" algn="bl" rotWithShape="0">
+            <a:outerShdw sx="100000" sy="100000" kx="0" ky="0" algn="bl" rotWithShape="0" blurRad="304800" dist="76200" dir="8100000">
               <a:srgbClr val="000000">
                 <a:alpha val="8000"/>
               </a:srgbClr>
             </a:outerShdw>
           </a:effectLst>
         </p:spPr>
-        <p:txBody>
-          <a:bodyPr/>
-          <a:lstStyle/>
-          <a:p>
-            <a:endParaRPr lang="zh-CN" altLang="en-US"/>
-          </a:p>
-        </p:txBody>
       </p:sp>
       <p:sp>
         <p:nvSpPr>
@@ -3983,7 +3929,7 @@
           <a:bodyPr wrap="square" lIns="0" tIns="0" rIns="0" bIns="0" rtlCol="0" anchor="ctr"/>
           <a:lstStyle/>
           <a:p>
-            <a:pPr marL="0" indent="0">
+            <a:pPr indent="0" marL="0">
               <a:buNone/>
             </a:pPr>
             <a:r>
@@ -4022,7 +3968,7 @@
           <a:bodyPr wrap="square" lIns="0" tIns="0" rIns="0" bIns="0" rtlCol="0" anchor="ctr"/>
           <a:lstStyle/>
           <a:p>
-            <a:pPr marL="0" indent="0">
+            <a:pPr indent="0" marL="0">
               <a:buNone/>
             </a:pPr>
             <a:r>
@@ -4061,7 +4007,7 @@
           <a:bodyPr wrap="square" lIns="0" tIns="0" rIns="0" bIns="0" rtlCol="0" anchor="ctr"/>
           <a:lstStyle/>
           <a:p>
-            <a:pPr marL="0" indent="0">
+            <a:pPr indent="0" marL="0">
               <a:buNone/>
             </a:pPr>
             <a:r>
@@ -4100,7 +4046,7 @@
           <a:bodyPr wrap="square" lIns="0" tIns="0" rIns="0" bIns="0" rtlCol="0" anchor="ctr"/>
           <a:lstStyle/>
           <a:p>
-            <a:pPr marL="0" indent="0">
+            <a:pPr indent="0" marL="0">
               <a:buNone/>
             </a:pPr>
             <a:r>
@@ -4139,7 +4085,7 @@
           <a:bodyPr wrap="square" lIns="0" tIns="0" rIns="0" bIns="0" rtlCol="0" anchor="ctr"/>
           <a:lstStyle/>
           <a:p>
-            <a:pPr marL="0" indent="0">
+            <a:pPr indent="0" marL="0">
               <a:buNone/>
             </a:pPr>
             <a:r>
@@ -4178,7 +4124,7 @@
           <a:bodyPr wrap="square" lIns="0" tIns="0" rIns="0" bIns="0" rtlCol="0" anchor="ctr"/>
           <a:lstStyle/>
           <a:p>
-            <a:pPr marL="0" indent="0">
+            <a:pPr indent="0" marL="0">
               <a:buNone/>
             </a:pPr>
             <a:r>
@@ -4217,7 +4163,7 @@
           <a:bodyPr wrap="square" lIns="0" tIns="0" rIns="0" bIns="0" rtlCol="0" anchor="ctr"/>
           <a:lstStyle/>
           <a:p>
-            <a:pPr marL="0" indent="0">
+            <a:pPr indent="0" marL="0">
               <a:buNone/>
             </a:pPr>
             <a:r>
@@ -4256,7 +4202,7 @@
           <a:bodyPr wrap="square" lIns="0" tIns="0" rIns="0" bIns="0" rtlCol="0" anchor="ctr"/>
           <a:lstStyle/>
           <a:p>
-            <a:pPr marL="0" indent="0">
+            <a:pPr indent="0" marL="0">
               <a:buNone/>
             </a:pPr>
             <a:r>
@@ -4296,13 +4242,6 @@
             <a:prstDash val="solid"/>
           </a:ln>
         </p:spPr>
-        <p:txBody>
-          <a:bodyPr/>
-          <a:lstStyle/>
-          <a:p>
-            <a:endParaRPr lang="zh-CN" altLang="en-US"/>
-          </a:p>
-        </p:txBody>
       </p:sp>
       <p:sp>
         <p:nvSpPr>
@@ -4325,7 +4264,7 @@
           <a:bodyPr wrap="square" lIns="0" tIns="0" rIns="0" bIns="0" rtlCol="0" anchor="ctr"/>
           <a:lstStyle/>
           <a:p>
-            <a:pPr marL="0" indent="0">
+            <a:pPr indent="0" marL="0">
               <a:buNone/>
             </a:pPr>
             <a:r>
@@ -4369,13 +4308,6 @@
             <a:prstDash val="solid"/>
           </a:ln>
         </p:spPr>
-        <p:txBody>
-          <a:bodyPr/>
-          <a:lstStyle/>
-          <a:p>
-            <a:endParaRPr lang="zh-CN" altLang="en-US"/>
-          </a:p>
-        </p:txBody>
       </p:sp>
       <p:sp>
         <p:nvSpPr>
@@ -4403,13 +4335,6 @@
             <a:prstDash val="solid"/>
           </a:ln>
         </p:spPr>
-        <p:txBody>
-          <a:bodyPr/>
-          <a:lstStyle/>
-          <a:p>
-            <a:endParaRPr lang="zh-CN" altLang="en-US"/>
-          </a:p>
-        </p:txBody>
       </p:sp>
       <p:sp>
         <p:nvSpPr>
@@ -4437,13 +4362,6 @@
             <a:prstDash val="solid"/>
           </a:ln>
         </p:spPr>
-        <p:txBody>
-          <a:bodyPr/>
-          <a:lstStyle/>
-          <a:p>
-            <a:endParaRPr lang="zh-CN" altLang="en-US"/>
-          </a:p>
-        </p:txBody>
       </p:sp>
       <p:sp>
         <p:nvSpPr>
@@ -4471,13 +4389,6 @@
             <a:prstDash val="solid"/>
           </a:ln>
         </p:spPr>
-        <p:txBody>
-          <a:bodyPr/>
-          <a:lstStyle/>
-          <a:p>
-            <a:endParaRPr lang="zh-CN" altLang="en-US"/>
-          </a:p>
-        </p:txBody>
       </p:sp>
       <p:sp>
         <p:nvSpPr>
@@ -4505,13 +4416,6 @@
             <a:prstDash val="solid"/>
           </a:ln>
         </p:spPr>
-        <p:txBody>
-          <a:bodyPr/>
-          <a:lstStyle/>
-          <a:p>
-            <a:endParaRPr lang="zh-CN" altLang="en-US"/>
-          </a:p>
-        </p:txBody>
       </p:sp>
       <p:sp>
         <p:nvSpPr>
@@ -4539,13 +4443,6 @@
             <a:prstDash val="solid"/>
           </a:ln>
         </p:spPr>
-        <p:txBody>
-          <a:bodyPr/>
-          <a:lstStyle/>
-          <a:p>
-            <a:endParaRPr lang="zh-CN" altLang="en-US"/>
-          </a:p>
-        </p:txBody>
       </p:sp>
       <p:sp>
         <p:nvSpPr>
@@ -4573,13 +4470,6 @@
             <a:prstDash val="solid"/>
           </a:ln>
         </p:spPr>
-        <p:txBody>
-          <a:bodyPr/>
-          <a:lstStyle/>
-          <a:p>
-            <a:endParaRPr lang="zh-CN" altLang="en-US"/>
-          </a:p>
-        </p:txBody>
       </p:sp>
       <p:sp>
         <p:nvSpPr>
@@ -4607,13 +4497,6 @@
             <a:prstDash val="solid"/>
           </a:ln>
         </p:spPr>
-        <p:txBody>
-          <a:bodyPr/>
-          <a:lstStyle/>
-          <a:p>
-            <a:endParaRPr lang="zh-CN" altLang="en-US"/>
-          </a:p>
-        </p:txBody>
       </p:sp>
       <p:sp>
         <p:nvSpPr>
@@ -4641,13 +4524,6 @@
             <a:prstDash val="solid"/>
           </a:ln>
         </p:spPr>
-        <p:txBody>
-          <a:bodyPr/>
-          <a:lstStyle/>
-          <a:p>
-            <a:endParaRPr lang="zh-CN" altLang="en-US"/>
-          </a:p>
-        </p:txBody>
       </p:sp>
       <p:sp>
         <p:nvSpPr>
@@ -4675,13 +4551,6 @@
             <a:prstDash val="solid"/>
           </a:ln>
         </p:spPr>
-        <p:txBody>
-          <a:bodyPr/>
-          <a:lstStyle/>
-          <a:p>
-            <a:endParaRPr lang="zh-CN" altLang="en-US"/>
-          </a:p>
-        </p:txBody>
       </p:sp>
       <p:sp>
         <p:nvSpPr>
@@ -4709,13 +4578,6 @@
             <a:prstDash val="solid"/>
           </a:ln>
         </p:spPr>
-        <p:txBody>
-          <a:bodyPr/>
-          <a:lstStyle/>
-          <a:p>
-            <a:endParaRPr lang="zh-CN" altLang="en-US"/>
-          </a:p>
-        </p:txBody>
       </p:sp>
       <p:sp>
         <p:nvSpPr>
@@ -4743,13 +4605,6 @@
             <a:prstDash val="solid"/>
           </a:ln>
         </p:spPr>
-        <p:txBody>
-          <a:bodyPr/>
-          <a:lstStyle/>
-          <a:p>
-            <a:endParaRPr lang="zh-CN" altLang="en-US"/>
-          </a:p>
-        </p:txBody>
       </p:sp>
       <p:sp>
         <p:nvSpPr>
@@ -4777,13 +4632,6 @@
             <a:prstDash val="solid"/>
           </a:ln>
         </p:spPr>
-        <p:txBody>
-          <a:bodyPr/>
-          <a:lstStyle/>
-          <a:p>
-            <a:endParaRPr lang="zh-CN" altLang="en-US"/>
-          </a:p>
-        </p:txBody>
       </p:sp>
       <p:sp>
         <p:nvSpPr>
@@ -4806,7 +4654,7 @@
           <a:bodyPr wrap="square" lIns="0" tIns="0" rIns="0" bIns="0" rtlCol="0" anchor="ctr"/>
           <a:lstStyle/>
           <a:p>
-            <a:pPr marL="0" indent="0">
+            <a:pPr indent="0" marL="0">
               <a:buNone/>
             </a:pPr>
             <a:r>
@@ -4845,7 +4693,7 @@
           <a:bodyPr wrap="square" lIns="0" tIns="0" rIns="0" bIns="0" rtlCol="0" anchor="ctr"/>
           <a:lstStyle/>
           <a:p>
-            <a:pPr marL="0" indent="0">
+            <a:pPr indent="0" marL="0">
               <a:buNone/>
             </a:pPr>
             <a:r>
@@ -4862,7 +4710,7 @@
             <a:endParaRPr lang="en-US" sz="1300" dirty="0"/>
           </a:p>
           <a:p>
-            <a:pPr marL="0" indent="0">
+            <a:pPr indent="0" marL="0">
               <a:buNone/>
             </a:pPr>
             <a:r>
@@ -4906,20 +4754,13 @@
             <a:prstDash val="solid"/>
           </a:ln>
           <a:effectLst>
-            <a:outerShdw blurRad="228600" dist="50800" dir="8100000" algn="bl" rotWithShape="0">
+            <a:outerShdw sx="100000" sy="100000" kx="0" ky="0" algn="bl" rotWithShape="0" blurRad="228600" dist="50800" dir="8100000">
               <a:srgbClr val="000000">
                 <a:alpha val="6000"/>
               </a:srgbClr>
             </a:outerShdw>
           </a:effectLst>
         </p:spPr>
-        <p:txBody>
-          <a:bodyPr/>
-          <a:lstStyle/>
-          <a:p>
-            <a:endParaRPr lang="zh-CN" altLang="en-US"/>
-          </a:p>
-        </p:txBody>
       </p:sp>
       <p:sp>
         <p:nvSpPr>
@@ -4942,7 +4783,7 @@
           <a:bodyPr wrap="square" lIns="0" tIns="0" rIns="0" bIns="0" rtlCol="0" anchor="ctr"/>
           <a:lstStyle/>
           <a:p>
-            <a:pPr marL="0" indent="0">
+            <a:pPr indent="0" marL="0">
               <a:buNone/>
             </a:pPr>
             <a:r>
@@ -4984,13 +4825,6 @@
             <a:prstDash val="solid"/>
           </a:ln>
         </p:spPr>
-        <p:txBody>
-          <a:bodyPr/>
-          <a:lstStyle/>
-          <a:p>
-            <a:endParaRPr lang="zh-CN" altLang="en-US"/>
-          </a:p>
-        </p:txBody>
       </p:sp>
       <p:sp>
         <p:nvSpPr>
@@ -5013,7 +4847,7 @@
           <a:bodyPr wrap="square" lIns="0" tIns="0" rIns="0" bIns="0" rtlCol="0" anchor="ctr"/>
           <a:lstStyle/>
           <a:p>
-            <a:pPr marL="0" indent="0" algn="ctr">
+            <a:pPr algn="ctr" indent="0" marL="0">
               <a:buNone/>
             </a:pPr>
             <a:r>
@@ -5050,7 +4884,6 @@
         <a:solidFill>
           <a:srgbClr val="F5F5F7"/>
         </a:solidFill>
-        <a:effectLst/>
       </p:bgPr>
     </p:bg>
     <p:spTree>
@@ -5088,7 +4921,7 @@
           <a:bodyPr wrap="square" lIns="0" tIns="0" rIns="0" bIns="0" rtlCol="0" anchor="ctr"/>
           <a:lstStyle/>
           <a:p>
-            <a:pPr marL="0" indent="0">
+            <a:pPr indent="0" marL="0">
               <a:buNone/>
             </a:pPr>
             <a:r>
@@ -5105,7 +4938,7 @@
             <a:endParaRPr lang="en-US" sz="3200" dirty="0"/>
           </a:p>
           <a:p>
-            <a:pPr marL="0" indent="0">
+            <a:pPr indent="0" marL="0">
               <a:buNone/>
             </a:pPr>
             <a:r>
@@ -5132,7 +4965,7 @@
         <p:spPr>
           <a:xfrm>
             <a:off x="640080" y="1828800"/>
-            <a:ext cx="4114800" cy="457200"/>
+            <a:ext cx="4114800" cy="640080"/>
           </a:xfrm>
           <a:prstGeom prst="rect">
             <a:avLst/>
@@ -5144,11 +4977,11 @@
           <a:bodyPr wrap="square" lIns="0" tIns="0" rIns="0" bIns="0" rtlCol="0" anchor="ctr"/>
           <a:lstStyle/>
           <a:p>
-            <a:pPr marL="0" indent="0">
-              <a:buNone/>
-            </a:pPr>
-            <a:r>
-              <a:rPr lang="en-US" sz="1500" dirty="0">
+            <a:pPr indent="0" marL="0">
+              <a:buNone/>
+            </a:pPr>
+            <a:r>
+              <a:rPr lang="en-US" sz="1400" dirty="0">
                 <a:solidFill>
                   <a:srgbClr val="8E8E93"/>
                 </a:solidFill>
@@ -5156,9 +4989,9 @@
                 <a:ea typeface="Arial" pitchFamily="34" charset="-122"/>
                 <a:cs typeface="Arial" pitchFamily="34" charset="-120"/>
               </a:rPr>
-              <a:t>从人工传递、人工审核，到 15 秒闭环。</a:t>
-            </a:r>
-            <a:endParaRPr lang="en-US" sz="1500" dirty="0"/>
+              <a:t>从原人工传递、人工审核，现在自动化线上 60s 完成闭环。</a:t>
+            </a:r>
+            <a:endParaRPr lang="en-US" sz="1400" dirty="0"/>
           </a:p>
         </p:txBody>
       </p:sp>
@@ -5186,13 +5019,6 @@
             <a:prstDash val="solid"/>
           </a:ln>
         </p:spPr>
-        <p:txBody>
-          <a:bodyPr/>
-          <a:lstStyle/>
-          <a:p>
-            <a:endParaRPr lang="zh-CN" altLang="en-US"/>
-          </a:p>
-        </p:txBody>
       </p:sp>
       <p:sp>
         <p:nvSpPr>
@@ -5218,13 +5044,6 @@
             <a:prstDash val="solid"/>
           </a:ln>
         </p:spPr>
-        <p:txBody>
-          <a:bodyPr/>
-          <a:lstStyle/>
-          <a:p>
-            <a:endParaRPr lang="zh-CN" altLang="en-US"/>
-          </a:p>
-        </p:txBody>
       </p:sp>
       <p:sp>
         <p:nvSpPr>
@@ -5250,13 +5069,6 @@
             <a:prstDash val="solid"/>
           </a:ln>
         </p:spPr>
-        <p:txBody>
-          <a:bodyPr/>
-          <a:lstStyle/>
-          <a:p>
-            <a:endParaRPr lang="zh-CN" altLang="en-US"/>
-          </a:p>
-        </p:txBody>
       </p:sp>
       <p:sp>
         <p:nvSpPr>
@@ -5282,13 +5094,6 @@
             <a:prstDash val="solid"/>
           </a:ln>
         </p:spPr>
-        <p:txBody>
-          <a:bodyPr/>
-          <a:lstStyle/>
-          <a:p>
-            <a:endParaRPr lang="zh-CN" altLang="en-US"/>
-          </a:p>
-        </p:txBody>
       </p:sp>
       <p:sp>
         <p:nvSpPr>
@@ -5314,13 +5119,6 @@
             <a:prstDash val="solid"/>
           </a:ln>
         </p:spPr>
-        <p:txBody>
-          <a:bodyPr/>
-          <a:lstStyle/>
-          <a:p>
-            <a:endParaRPr lang="zh-CN" altLang="en-US"/>
-          </a:p>
-        </p:txBody>
       </p:sp>
       <p:sp>
         <p:nvSpPr>
@@ -5346,13 +5144,6 @@
             <a:prstDash val="solid"/>
           </a:ln>
         </p:spPr>
-        <p:txBody>
-          <a:bodyPr/>
-          <a:lstStyle/>
-          <a:p>
-            <a:endParaRPr lang="zh-CN" altLang="en-US"/>
-          </a:p>
-        </p:txBody>
       </p:sp>
       <p:sp>
         <p:nvSpPr>
@@ -5378,13 +5169,6 @@
             <a:prstDash val="solid"/>
           </a:ln>
         </p:spPr>
-        <p:txBody>
-          <a:bodyPr/>
-          <a:lstStyle/>
-          <a:p>
-            <a:endParaRPr lang="zh-CN" altLang="en-US"/>
-          </a:p>
-        </p:txBody>
       </p:sp>
       <p:sp>
         <p:nvSpPr>
@@ -5410,13 +5194,6 @@
             <a:prstDash val="solid"/>
           </a:ln>
         </p:spPr>
-        <p:txBody>
-          <a:bodyPr/>
-          <a:lstStyle/>
-          <a:p>
-            <a:endParaRPr lang="zh-CN" altLang="en-US"/>
-          </a:p>
-        </p:txBody>
       </p:sp>
       <p:sp>
         <p:nvSpPr>
@@ -5442,13 +5219,6 @@
             <a:prstDash val="solid"/>
           </a:ln>
         </p:spPr>
-        <p:txBody>
-          <a:bodyPr/>
-          <a:lstStyle/>
-          <a:p>
-            <a:endParaRPr lang="zh-CN" altLang="en-US"/>
-          </a:p>
-        </p:txBody>
       </p:sp>
       <p:sp>
         <p:nvSpPr>
@@ -5474,13 +5244,6 @@
             <a:prstDash val="solid"/>
           </a:ln>
         </p:spPr>
-        <p:txBody>
-          <a:bodyPr/>
-          <a:lstStyle/>
-          <a:p>
-            <a:endParaRPr lang="zh-CN" altLang="en-US"/>
-          </a:p>
-        </p:txBody>
       </p:sp>
       <p:sp>
         <p:nvSpPr>
@@ -5506,13 +5269,6 @@
             <a:prstDash val="solid"/>
           </a:ln>
         </p:spPr>
-        <p:txBody>
-          <a:bodyPr/>
-          <a:lstStyle/>
-          <a:p>
-            <a:endParaRPr lang="zh-CN" altLang="en-US"/>
-          </a:p>
-        </p:txBody>
       </p:sp>
       <p:sp>
         <p:nvSpPr>
@@ -5538,13 +5294,6 @@
             <a:prstDash val="solid"/>
           </a:ln>
         </p:spPr>
-        <p:txBody>
-          <a:bodyPr/>
-          <a:lstStyle/>
-          <a:p>
-            <a:endParaRPr lang="zh-CN" altLang="en-US"/>
-          </a:p>
-        </p:txBody>
       </p:sp>
       <p:sp>
         <p:nvSpPr>
@@ -5570,13 +5319,6 @@
             <a:prstDash val="solid"/>
           </a:ln>
         </p:spPr>
-        <p:txBody>
-          <a:bodyPr/>
-          <a:lstStyle/>
-          <a:p>
-            <a:endParaRPr lang="zh-CN" altLang="en-US"/>
-          </a:p>
-        </p:txBody>
       </p:sp>
       <p:sp>
         <p:nvSpPr>
@@ -5602,13 +5344,6 @@
             <a:prstDash val="solid"/>
           </a:ln>
         </p:spPr>
-        <p:txBody>
-          <a:bodyPr/>
-          <a:lstStyle/>
-          <a:p>
-            <a:endParaRPr lang="zh-CN" altLang="en-US"/>
-          </a:p>
-        </p:txBody>
       </p:sp>
       <p:sp>
         <p:nvSpPr>
@@ -5634,13 +5369,6 @@
             <a:prstDash val="solid"/>
           </a:ln>
         </p:spPr>
-        <p:txBody>
-          <a:bodyPr/>
-          <a:lstStyle/>
-          <a:p>
-            <a:endParaRPr lang="zh-CN" altLang="en-US"/>
-          </a:p>
-        </p:txBody>
       </p:sp>
       <p:sp>
         <p:nvSpPr>
@@ -5666,13 +5394,6 @@
             <a:prstDash val="solid"/>
           </a:ln>
         </p:spPr>
-        <p:txBody>
-          <a:bodyPr/>
-          <a:lstStyle/>
-          <a:p>
-            <a:endParaRPr lang="zh-CN" altLang="en-US"/>
-          </a:p>
-        </p:txBody>
       </p:sp>
       <p:sp>
         <p:nvSpPr>
@@ -5698,13 +5419,6 @@
             <a:prstDash val="solid"/>
           </a:ln>
         </p:spPr>
-        <p:txBody>
-          <a:bodyPr/>
-          <a:lstStyle/>
-          <a:p>
-            <a:endParaRPr lang="zh-CN" altLang="en-US"/>
-          </a:p>
-        </p:txBody>
       </p:sp>
       <p:sp>
         <p:nvSpPr>
@@ -5730,13 +5444,6 @@
             <a:prstDash val="solid"/>
           </a:ln>
         </p:spPr>
-        <p:txBody>
-          <a:bodyPr/>
-          <a:lstStyle/>
-          <a:p>
-            <a:endParaRPr lang="zh-CN" altLang="en-US"/>
-          </a:p>
-        </p:txBody>
       </p:sp>
       <p:sp>
         <p:nvSpPr>
@@ -5762,13 +5469,6 @@
             <a:prstDash val="solid"/>
           </a:ln>
         </p:spPr>
-        <p:txBody>
-          <a:bodyPr/>
-          <a:lstStyle/>
-          <a:p>
-            <a:endParaRPr lang="zh-CN" altLang="en-US"/>
-          </a:p>
-        </p:txBody>
       </p:sp>
       <p:sp>
         <p:nvSpPr>
@@ -5794,13 +5494,6 @@
             <a:prstDash val="solid"/>
           </a:ln>
         </p:spPr>
-        <p:txBody>
-          <a:bodyPr/>
-          <a:lstStyle/>
-          <a:p>
-            <a:endParaRPr lang="zh-CN" altLang="en-US"/>
-          </a:p>
-        </p:txBody>
       </p:sp>
       <p:sp>
         <p:nvSpPr>
@@ -5823,7 +5516,7 @@
           <a:bodyPr wrap="square" lIns="0" tIns="0" rIns="0" bIns="0" rtlCol="0" anchor="ctr"/>
           <a:lstStyle/>
           <a:p>
-            <a:pPr marL="0" indent="0">
+            <a:pPr indent="0" marL="0">
               <a:buNone/>
             </a:pPr>
             <a:r>
@@ -5849,8 +5542,8 @@
         </p:nvSpPr>
         <p:spPr>
           <a:xfrm>
-            <a:off x="7955280" y="3840480"/>
-            <a:ext cx="640080" cy="228600"/>
+            <a:off x="7818120" y="3840480"/>
+            <a:ext cx="822960" cy="228600"/>
           </a:xfrm>
           <a:prstGeom prst="rect">
             <a:avLst/>
@@ -5862,7 +5555,7 @@
           <a:bodyPr wrap="square" lIns="0" tIns="0" rIns="0" bIns="0" rtlCol="0" anchor="ctr"/>
           <a:lstStyle/>
           <a:p>
-            <a:pPr marL="0" indent="0">
+            <a:pPr indent="0" marL="0">
               <a:buNone/>
             </a:pPr>
             <a:r>
@@ -5874,7 +5567,7 @@
                 <a:ea typeface="Arial" pitchFamily="34" charset="-122"/>
                 <a:cs typeface="Arial" pitchFamily="34" charset="-120"/>
               </a:rPr>
-              <a:t>15 s</a:t>
+              <a:t>60s</a:t>
             </a:r>
             <a:endParaRPr lang="en-US" sz="1000" dirty="0"/>
           </a:p>
@@ -5899,7 +5592,6 @@
         <a:solidFill>
           <a:srgbClr val="F5F5F7"/>
         </a:solidFill>
-        <a:effectLst/>
       </p:bgPr>
     </p:bg>
     <p:spTree>
@@ -5937,7 +5629,7 @@
           <a:bodyPr wrap="square" lIns="0" tIns="0" rIns="0" bIns="0" rtlCol="0" anchor="ctr"/>
           <a:lstStyle/>
           <a:p>
-            <a:pPr marL="0" indent="0">
+            <a:pPr indent="0" marL="0">
               <a:buNone/>
             </a:pPr>
             <a:r>
@@ -5976,7 +5668,7 @@
           <a:bodyPr wrap="square" lIns="0" tIns="0" rIns="0" bIns="0" rtlCol="0" anchor="ctr"/>
           <a:lstStyle/>
           <a:p>
-            <a:pPr marL="0" indent="0">
+            <a:pPr indent="0" marL="0">
               <a:buNone/>
             </a:pPr>
             <a:r>
@@ -6020,20 +5712,13 @@
             <a:prstDash val="solid"/>
           </a:ln>
           <a:effectLst>
-            <a:outerShdw blurRad="228600" dist="50800" dir="8100000" algn="bl" rotWithShape="0">
+            <a:outerShdw sx="100000" sy="100000" kx="0" ky="0" algn="bl" rotWithShape="0" blurRad="228600" dist="50800" dir="8100000">
               <a:srgbClr val="000000">
                 <a:alpha val="6000"/>
               </a:srgbClr>
             </a:outerShdw>
           </a:effectLst>
         </p:spPr>
-        <p:txBody>
-          <a:bodyPr/>
-          <a:lstStyle/>
-          <a:p>
-            <a:endParaRPr lang="zh-CN" altLang="en-US"/>
-          </a:p>
-        </p:txBody>
       </p:sp>
       <p:sp>
         <p:nvSpPr>
@@ -6056,7 +5741,7 @@
           <a:bodyPr wrap="square" lIns="0" tIns="0" rIns="0" bIns="0" rtlCol="0" anchor="ctr"/>
           <a:lstStyle/>
           <a:p>
-            <a:pPr marL="0" indent="0">
+            <a:pPr indent="0" marL="0">
               <a:buNone/>
             </a:pPr>
             <a:r>
@@ -6095,7 +5780,7 @@
           <a:bodyPr wrap="square" lIns="0" tIns="0" rIns="0" bIns="0" rtlCol="0" anchor="ctr"/>
           <a:lstStyle/>
           <a:p>
-            <a:pPr marL="0" indent="0">
+            <a:pPr indent="0" marL="0">
               <a:buNone/>
             </a:pPr>
             <a:r>
@@ -6134,7 +5819,7 @@
           <a:bodyPr wrap="square" lIns="0" tIns="0" rIns="0" bIns="0" rtlCol="0" anchor="ctr"/>
           <a:lstStyle/>
           <a:p>
-            <a:pPr marL="0" indent="0">
+            <a:pPr indent="0" marL="0">
               <a:buNone/>
             </a:pPr>
             <a:r>
@@ -6151,7 +5836,7 @@
             <a:endParaRPr lang="en-US" sz="1200" dirty="0"/>
           </a:p>
           <a:p>
-            <a:pPr marL="0" indent="0">
+            <a:pPr indent="0" marL="0">
               <a:buNone/>
             </a:pPr>
             <a:r>
@@ -6195,20 +5880,13 @@
             <a:prstDash val="solid"/>
           </a:ln>
           <a:effectLst>
-            <a:outerShdw blurRad="228600" dist="50800" dir="8100000" algn="bl" rotWithShape="0">
+            <a:outerShdw sx="100000" sy="100000" kx="0" ky="0" algn="bl" rotWithShape="0" blurRad="228600" dist="50800" dir="8100000">
               <a:srgbClr val="000000">
                 <a:alpha val="6000"/>
               </a:srgbClr>
             </a:outerShdw>
           </a:effectLst>
         </p:spPr>
-        <p:txBody>
-          <a:bodyPr/>
-          <a:lstStyle/>
-          <a:p>
-            <a:endParaRPr lang="zh-CN" altLang="en-US"/>
-          </a:p>
-        </p:txBody>
       </p:sp>
       <p:sp>
         <p:nvSpPr>
@@ -6231,7 +5909,7 @@
           <a:bodyPr wrap="square" lIns="0" tIns="0" rIns="0" bIns="0" rtlCol="0" anchor="ctr"/>
           <a:lstStyle/>
           <a:p>
-            <a:pPr marL="0" indent="0">
+            <a:pPr indent="0" marL="0">
               <a:buNone/>
             </a:pPr>
             <a:r>
@@ -6270,7 +5948,7 @@
           <a:bodyPr wrap="square" lIns="0" tIns="0" rIns="0" bIns="0" rtlCol="0" anchor="ctr"/>
           <a:lstStyle/>
           <a:p>
-            <a:pPr marL="0" indent="0">
+            <a:pPr indent="0" marL="0">
               <a:buNone/>
             </a:pPr>
             <a:r>
@@ -6309,7 +5987,7 @@
           <a:bodyPr wrap="square" lIns="0" tIns="0" rIns="0" bIns="0" rtlCol="0" anchor="ctr"/>
           <a:lstStyle/>
           <a:p>
-            <a:pPr marL="0" indent="0">
+            <a:pPr indent="0" marL="0">
               <a:buNone/>
             </a:pPr>
             <a:r>
@@ -6326,7 +6004,7 @@
             <a:endParaRPr lang="en-US" sz="1200" dirty="0"/>
           </a:p>
           <a:p>
-            <a:pPr marL="0" indent="0">
+            <a:pPr indent="0" marL="0">
               <a:buNone/>
             </a:pPr>
             <a:r>
@@ -6370,20 +6048,13 @@
             <a:prstDash val="solid"/>
           </a:ln>
           <a:effectLst>
-            <a:outerShdw blurRad="228600" dist="50800" dir="8100000" algn="bl" rotWithShape="0">
+            <a:outerShdw sx="100000" sy="100000" kx="0" ky="0" algn="bl" rotWithShape="0" blurRad="228600" dist="50800" dir="8100000">
               <a:srgbClr val="000000">
                 <a:alpha val="6000"/>
               </a:srgbClr>
             </a:outerShdw>
           </a:effectLst>
         </p:spPr>
-        <p:txBody>
-          <a:bodyPr/>
-          <a:lstStyle/>
-          <a:p>
-            <a:endParaRPr lang="zh-CN" altLang="en-US"/>
-          </a:p>
-        </p:txBody>
       </p:sp>
       <p:sp>
         <p:nvSpPr>
@@ -6406,7 +6077,7 @@
           <a:bodyPr wrap="square" lIns="0" tIns="0" rIns="0" bIns="0" rtlCol="0" anchor="ctr"/>
           <a:lstStyle/>
           <a:p>
-            <a:pPr marL="0" indent="0">
+            <a:pPr indent="0" marL="0">
               <a:buNone/>
             </a:pPr>
             <a:r>
@@ -6445,7 +6116,7 @@
           <a:bodyPr wrap="square" lIns="0" tIns="0" rIns="0" bIns="0" rtlCol="0" anchor="ctr"/>
           <a:lstStyle/>
           <a:p>
-            <a:pPr marL="0" indent="0">
+            <a:pPr indent="0" marL="0">
               <a:buNone/>
             </a:pPr>
             <a:r>
@@ -6484,7 +6155,7 @@
           <a:bodyPr wrap="square" lIns="0" tIns="0" rIns="0" bIns="0" rtlCol="0" anchor="ctr"/>
           <a:lstStyle/>
           <a:p>
-            <a:pPr marL="0" indent="0">
+            <a:pPr indent="0" marL="0">
               <a:buNone/>
             </a:pPr>
             <a:r>
@@ -6501,7 +6172,7 @@
             <a:endParaRPr lang="en-US" sz="1200" dirty="0"/>
           </a:p>
           <a:p>
-            <a:pPr marL="0" indent="0">
+            <a:pPr indent="0" marL="0">
               <a:buNone/>
             </a:pPr>
             <a:r>
@@ -6545,20 +6216,13 @@
             <a:prstDash val="solid"/>
           </a:ln>
           <a:effectLst>
-            <a:outerShdw blurRad="228600" dist="50800" dir="8100000" algn="bl" rotWithShape="0">
+            <a:outerShdw sx="100000" sy="100000" kx="0" ky="0" algn="bl" rotWithShape="0" blurRad="228600" dist="50800" dir="8100000">
               <a:srgbClr val="000000">
                 <a:alpha val="6000"/>
               </a:srgbClr>
             </a:outerShdw>
           </a:effectLst>
         </p:spPr>
-        <p:txBody>
-          <a:bodyPr/>
-          <a:lstStyle/>
-          <a:p>
-            <a:endParaRPr lang="zh-CN" altLang="en-US"/>
-          </a:p>
-        </p:txBody>
       </p:sp>
       <p:sp>
         <p:nvSpPr>
@@ -6581,7 +6245,7 @@
           <a:bodyPr wrap="square" lIns="0" tIns="0" rIns="0" bIns="0" rtlCol="0" anchor="ctr"/>
           <a:lstStyle/>
           <a:p>
-            <a:pPr marL="0" indent="0">
+            <a:pPr indent="0" marL="0">
               <a:buNone/>
             </a:pPr>
             <a:r>
@@ -6620,7 +6284,7 @@
           <a:bodyPr wrap="square" lIns="0" tIns="0" rIns="0" bIns="0" rtlCol="0" anchor="ctr"/>
           <a:lstStyle/>
           <a:p>
-            <a:pPr marL="0" indent="0">
+            <a:pPr indent="0" marL="0">
               <a:buNone/>
             </a:pPr>
             <a:r>
@@ -6659,7 +6323,7 @@
           <a:bodyPr wrap="square" lIns="0" tIns="0" rIns="0" bIns="0" rtlCol="0" anchor="ctr"/>
           <a:lstStyle/>
           <a:p>
-            <a:pPr marL="0" indent="0">
+            <a:pPr indent="0" marL="0">
               <a:buNone/>
             </a:pPr>
             <a:r>
@@ -6676,7 +6340,7 @@
             <a:endParaRPr lang="en-US" sz="1200" dirty="0"/>
           </a:p>
           <a:p>
-            <a:pPr marL="0" indent="0">
+            <a:pPr indent="0" marL="0">
               <a:buNone/>
             </a:pPr>
             <a:r>
@@ -6720,20 +6384,13 @@
             <a:prstDash val="solid"/>
           </a:ln>
           <a:effectLst>
-            <a:outerShdw blurRad="228600" dist="50800" dir="8100000" algn="bl" rotWithShape="0">
+            <a:outerShdw sx="100000" sy="100000" kx="0" ky="0" algn="bl" rotWithShape="0" blurRad="228600" dist="50800" dir="8100000">
               <a:srgbClr val="000000">
                 <a:alpha val="6000"/>
               </a:srgbClr>
             </a:outerShdw>
           </a:effectLst>
         </p:spPr>
-        <p:txBody>
-          <a:bodyPr/>
-          <a:lstStyle/>
-          <a:p>
-            <a:endParaRPr lang="zh-CN" altLang="en-US"/>
-          </a:p>
-        </p:txBody>
       </p:sp>
       <p:sp>
         <p:nvSpPr>
@@ -6756,7 +6413,7 @@
           <a:bodyPr wrap="square" lIns="0" tIns="0" rIns="0" bIns="0" rtlCol="0" anchor="ctr"/>
           <a:lstStyle/>
           <a:p>
-            <a:pPr marL="0" indent="0">
+            <a:pPr indent="0" marL="0">
               <a:buNone/>
             </a:pPr>
             <a:r>
@@ -6795,7 +6452,7 @@
           <a:bodyPr wrap="square" lIns="0" tIns="0" rIns="0" bIns="0" rtlCol="0" anchor="ctr"/>
           <a:lstStyle/>
           <a:p>
-            <a:pPr marL="0" indent="0">
+            <a:pPr indent="0" marL="0">
               <a:buNone/>
             </a:pPr>
             <a:r>
@@ -6834,7 +6491,7 @@
           <a:bodyPr wrap="square" lIns="0" tIns="0" rIns="0" bIns="0" rtlCol="0" anchor="ctr"/>
           <a:lstStyle/>
           <a:p>
-            <a:pPr marL="0" indent="0">
+            <a:pPr indent="0" marL="0">
               <a:buNone/>
             </a:pPr>
             <a:r>
@@ -6851,7 +6508,7 @@
             <a:endParaRPr lang="en-US" sz="1200" dirty="0"/>
           </a:p>
           <a:p>
-            <a:pPr marL="0" indent="0">
+            <a:pPr indent="0" marL="0">
               <a:buNone/>
             </a:pPr>
             <a:r>
@@ -6888,7 +6545,6 @@
         <a:solidFill>
           <a:srgbClr val="F5F5F7"/>
         </a:solidFill>
-        <a:effectLst/>
       </p:bgPr>
     </p:bg>
     <p:spTree>
@@ -6926,7 +6582,7 @@
           <a:bodyPr wrap="square" lIns="0" tIns="0" rIns="0" bIns="0" rtlCol="0" anchor="ctr"/>
           <a:lstStyle/>
           <a:p>
-            <a:pPr marL="0" indent="0">
+            <a:pPr indent="0" marL="0">
               <a:buNone/>
             </a:pPr>
             <a:r>
@@ -6970,20 +6626,13 @@
             <a:prstDash val="solid"/>
           </a:ln>
           <a:effectLst>
-            <a:outerShdw blurRad="228600" dist="50800" dir="8100000" algn="bl" rotWithShape="0">
+            <a:outerShdw sx="100000" sy="100000" kx="0" ky="0" algn="bl" rotWithShape="0" blurRad="228600" dist="50800" dir="8100000">
               <a:srgbClr val="000000">
                 <a:alpha val="6000"/>
               </a:srgbClr>
             </a:outerShdw>
           </a:effectLst>
         </p:spPr>
-        <p:txBody>
-          <a:bodyPr/>
-          <a:lstStyle/>
-          <a:p>
-            <a:endParaRPr lang="zh-CN" altLang="en-US"/>
-          </a:p>
-        </p:txBody>
       </p:sp>
       <p:sp>
         <p:nvSpPr>
@@ -7009,13 +6658,6 @@
             <a:prstDash val="solid"/>
           </a:ln>
         </p:spPr>
-        <p:txBody>
-          <a:bodyPr/>
-          <a:lstStyle/>
-          <a:p>
-            <a:endParaRPr lang="zh-CN" altLang="en-US"/>
-          </a:p>
-        </p:txBody>
       </p:sp>
       <p:sp>
         <p:nvSpPr>
@@ -7038,7 +6680,7 @@
           <a:bodyPr wrap="square" lIns="0" tIns="0" rIns="0" bIns="0" rtlCol="0" anchor="ctr"/>
           <a:lstStyle/>
           <a:p>
-            <a:pPr marL="0" indent="0">
+            <a:pPr indent="0" marL="0">
               <a:buNone/>
             </a:pPr>
             <a:r>
@@ -7077,7 +6719,7 @@
           <a:bodyPr wrap="square" lIns="0" tIns="0" rIns="0" bIns="0" rtlCol="0" anchor="ctr"/>
           <a:lstStyle/>
           <a:p>
-            <a:pPr marL="0" indent="0">
+            <a:pPr indent="0" marL="0">
               <a:buNone/>
             </a:pPr>
             <a:r>
@@ -7094,7 +6736,7 @@
             <a:endParaRPr lang="en-US" sz="1200" dirty="0"/>
           </a:p>
           <a:p>
-            <a:pPr marL="0" indent="0">
+            <a:pPr indent="0" marL="0">
               <a:buNone/>
             </a:pPr>
             <a:r>
@@ -7138,20 +6780,13 @@
             <a:prstDash val="solid"/>
           </a:ln>
           <a:effectLst>
-            <a:outerShdw blurRad="228600" dist="50800" dir="8100000" algn="bl" rotWithShape="0">
+            <a:outerShdw sx="100000" sy="100000" kx="0" ky="0" algn="bl" rotWithShape="0" blurRad="228600" dist="50800" dir="8100000">
               <a:srgbClr val="000000">
                 <a:alpha val="6000"/>
               </a:srgbClr>
             </a:outerShdw>
           </a:effectLst>
         </p:spPr>
-        <p:txBody>
-          <a:bodyPr/>
-          <a:lstStyle/>
-          <a:p>
-            <a:endParaRPr lang="zh-CN" altLang="en-US"/>
-          </a:p>
-        </p:txBody>
       </p:sp>
       <p:sp>
         <p:nvSpPr>
@@ -7177,13 +6812,6 @@
             <a:prstDash val="solid"/>
           </a:ln>
         </p:spPr>
-        <p:txBody>
-          <a:bodyPr/>
-          <a:lstStyle/>
-          <a:p>
-            <a:endParaRPr lang="zh-CN" altLang="en-US"/>
-          </a:p>
-        </p:txBody>
       </p:sp>
       <p:sp>
         <p:nvSpPr>
@@ -7206,7 +6834,7 @@
           <a:bodyPr wrap="square" lIns="0" tIns="0" rIns="0" bIns="0" rtlCol="0" anchor="ctr"/>
           <a:lstStyle/>
           <a:p>
-            <a:pPr marL="0" indent="0">
+            <a:pPr indent="0" marL="0">
               <a:buNone/>
             </a:pPr>
             <a:r>
@@ -7245,7 +6873,7 @@
           <a:bodyPr wrap="square" lIns="0" tIns="0" rIns="0" bIns="0" rtlCol="0" anchor="ctr"/>
           <a:lstStyle/>
           <a:p>
-            <a:pPr marL="0" indent="0">
+            <a:pPr indent="0" marL="0">
               <a:buNone/>
             </a:pPr>
             <a:r>
@@ -7262,7 +6890,7 @@
             <a:endParaRPr lang="en-US" sz="1200" dirty="0"/>
           </a:p>
           <a:p>
-            <a:pPr marL="0" indent="0">
+            <a:pPr indent="0" marL="0">
               <a:buNone/>
             </a:pPr>
             <a:r>
@@ -7306,20 +6934,13 @@
             <a:prstDash val="solid"/>
           </a:ln>
           <a:effectLst>
-            <a:outerShdw blurRad="228600" dist="50800" dir="8100000" algn="bl" rotWithShape="0">
+            <a:outerShdw sx="100000" sy="100000" kx="0" ky="0" algn="bl" rotWithShape="0" blurRad="228600" dist="50800" dir="8100000">
               <a:srgbClr val="000000">
                 <a:alpha val="6000"/>
               </a:srgbClr>
             </a:outerShdw>
           </a:effectLst>
         </p:spPr>
-        <p:txBody>
-          <a:bodyPr/>
-          <a:lstStyle/>
-          <a:p>
-            <a:endParaRPr lang="zh-CN" altLang="en-US"/>
-          </a:p>
-        </p:txBody>
       </p:sp>
       <p:sp>
         <p:nvSpPr>
@@ -7345,13 +6966,6 @@
             <a:prstDash val="solid"/>
           </a:ln>
         </p:spPr>
-        <p:txBody>
-          <a:bodyPr/>
-          <a:lstStyle/>
-          <a:p>
-            <a:endParaRPr lang="zh-CN" altLang="en-US"/>
-          </a:p>
-        </p:txBody>
       </p:sp>
       <p:sp>
         <p:nvSpPr>
@@ -7374,7 +6988,7 @@
           <a:bodyPr wrap="square" lIns="0" tIns="0" rIns="0" bIns="0" rtlCol="0" anchor="ctr"/>
           <a:lstStyle/>
           <a:p>
-            <a:pPr marL="0" indent="0">
+            <a:pPr indent="0" marL="0">
               <a:buNone/>
             </a:pPr>
             <a:r>
@@ -7413,7 +7027,7 @@
           <a:bodyPr wrap="square" lIns="0" tIns="0" rIns="0" bIns="0" rtlCol="0" anchor="ctr"/>
           <a:lstStyle/>
           <a:p>
-            <a:pPr marL="0" indent="0">
+            <a:pPr indent="0" marL="0">
               <a:buNone/>
             </a:pPr>
             <a:r>
@@ -7430,7 +7044,7 @@
             <a:endParaRPr lang="en-US" sz="1200" dirty="0"/>
           </a:p>
           <a:p>
-            <a:pPr marL="0" indent="0">
+            <a:pPr indent="0" marL="0">
               <a:buNone/>
             </a:pPr>
             <a:r>
@@ -7474,20 +7088,13 @@
             <a:prstDash val="solid"/>
           </a:ln>
           <a:effectLst>
-            <a:outerShdw blurRad="228600" dist="50800" dir="8100000" algn="bl" rotWithShape="0">
+            <a:outerShdw sx="100000" sy="100000" kx="0" ky="0" algn="bl" rotWithShape="0" blurRad="228600" dist="50800" dir="8100000">
               <a:srgbClr val="000000">
                 <a:alpha val="6000"/>
               </a:srgbClr>
             </a:outerShdw>
           </a:effectLst>
         </p:spPr>
-        <p:txBody>
-          <a:bodyPr/>
-          <a:lstStyle/>
-          <a:p>
-            <a:endParaRPr lang="zh-CN" altLang="en-US"/>
-          </a:p>
-        </p:txBody>
       </p:sp>
       <p:sp>
         <p:nvSpPr>
@@ -7513,13 +7120,6 @@
             <a:prstDash val="solid"/>
           </a:ln>
         </p:spPr>
-        <p:txBody>
-          <a:bodyPr/>
-          <a:lstStyle/>
-          <a:p>
-            <a:endParaRPr lang="zh-CN" altLang="en-US"/>
-          </a:p>
-        </p:txBody>
       </p:sp>
       <p:sp>
         <p:nvSpPr>
@@ -7542,7 +7142,7 @@
           <a:bodyPr wrap="square" lIns="0" tIns="0" rIns="0" bIns="0" rtlCol="0" anchor="ctr"/>
           <a:lstStyle/>
           <a:p>
-            <a:pPr marL="0" indent="0">
+            <a:pPr indent="0" marL="0">
               <a:buNone/>
             </a:pPr>
             <a:r>
@@ -7581,7 +7181,7 @@
           <a:bodyPr wrap="square" lIns="0" tIns="0" rIns="0" bIns="0" rtlCol="0" anchor="ctr"/>
           <a:lstStyle/>
           <a:p>
-            <a:pPr marL="0" indent="0">
+            <a:pPr indent="0" marL="0">
               <a:buNone/>
             </a:pPr>
             <a:r>
@@ -7598,7 +7198,7 @@
             <a:endParaRPr lang="en-US" sz="1200" dirty="0"/>
           </a:p>
           <a:p>
-            <a:pPr marL="0" indent="0">
+            <a:pPr indent="0" marL="0">
               <a:buNone/>
             </a:pPr>
             <a:r>
@@ -7642,20 +7242,13 @@
             <a:prstDash val="solid"/>
           </a:ln>
           <a:effectLst>
-            <a:outerShdw blurRad="228600" dist="50800" dir="8100000" algn="bl" rotWithShape="0">
+            <a:outerShdw sx="100000" sy="100000" kx="0" ky="0" algn="bl" rotWithShape="0" blurRad="228600" dist="50800" dir="8100000">
               <a:srgbClr val="000000">
                 <a:alpha val="6000"/>
               </a:srgbClr>
             </a:outerShdw>
           </a:effectLst>
         </p:spPr>
-        <p:txBody>
-          <a:bodyPr/>
-          <a:lstStyle/>
-          <a:p>
-            <a:endParaRPr lang="zh-CN" altLang="en-US"/>
-          </a:p>
-        </p:txBody>
       </p:sp>
       <p:sp>
         <p:nvSpPr>
@@ -7681,13 +7274,6 @@
             <a:prstDash val="solid"/>
           </a:ln>
         </p:spPr>
-        <p:txBody>
-          <a:bodyPr/>
-          <a:lstStyle/>
-          <a:p>
-            <a:endParaRPr lang="zh-CN" altLang="en-US"/>
-          </a:p>
-        </p:txBody>
       </p:sp>
       <p:sp>
         <p:nvSpPr>
@@ -7710,7 +7296,7 @@
           <a:bodyPr wrap="square" lIns="0" tIns="0" rIns="0" bIns="0" rtlCol="0" anchor="ctr"/>
           <a:lstStyle/>
           <a:p>
-            <a:pPr marL="0" indent="0">
+            <a:pPr indent="0" marL="0">
               <a:buNone/>
             </a:pPr>
             <a:r>
@@ -7749,7 +7335,7 @@
           <a:bodyPr wrap="square" lIns="0" tIns="0" rIns="0" bIns="0" rtlCol="0" anchor="ctr"/>
           <a:lstStyle/>
           <a:p>
-            <a:pPr marL="0" indent="0">
+            <a:pPr indent="0" marL="0">
               <a:buNone/>
             </a:pPr>
             <a:r>
@@ -7766,7 +7352,7 @@
             <a:endParaRPr lang="en-US" sz="1200" dirty="0"/>
           </a:p>
           <a:p>
-            <a:pPr marL="0" indent="0">
+            <a:pPr indent="0" marL="0">
               <a:buNone/>
             </a:pPr>
             <a:r>
@@ -7810,20 +7396,13 @@
             <a:prstDash val="solid"/>
           </a:ln>
           <a:effectLst>
-            <a:outerShdw blurRad="228600" dist="50800" dir="8100000" algn="bl" rotWithShape="0">
+            <a:outerShdw sx="100000" sy="100000" kx="0" ky="0" algn="bl" rotWithShape="0" blurRad="228600" dist="50800" dir="8100000">
               <a:srgbClr val="000000">
                 <a:alpha val="6000"/>
               </a:srgbClr>
             </a:outerShdw>
           </a:effectLst>
         </p:spPr>
-        <p:txBody>
-          <a:bodyPr/>
-          <a:lstStyle/>
-          <a:p>
-            <a:endParaRPr lang="zh-CN" altLang="en-US"/>
-          </a:p>
-        </p:txBody>
       </p:sp>
       <p:sp>
         <p:nvSpPr>
@@ -7849,13 +7428,6 @@
             <a:prstDash val="solid"/>
           </a:ln>
         </p:spPr>
-        <p:txBody>
-          <a:bodyPr/>
-          <a:lstStyle/>
-          <a:p>
-            <a:endParaRPr lang="zh-CN" altLang="en-US"/>
-          </a:p>
-        </p:txBody>
       </p:sp>
       <p:sp>
         <p:nvSpPr>
@@ -7878,7 +7450,7 @@
           <a:bodyPr wrap="square" lIns="0" tIns="0" rIns="0" bIns="0" rtlCol="0" anchor="ctr"/>
           <a:lstStyle/>
           <a:p>
-            <a:pPr marL="0" indent="0">
+            <a:pPr indent="0" marL="0">
               <a:buNone/>
             </a:pPr>
             <a:r>
@@ -7917,7 +7489,7 @@
           <a:bodyPr wrap="square" lIns="0" tIns="0" rIns="0" bIns="0" rtlCol="0" anchor="ctr"/>
           <a:lstStyle/>
           <a:p>
-            <a:pPr marL="0" indent="0">
+            <a:pPr indent="0" marL="0">
               <a:buNone/>
             </a:pPr>
             <a:r>
@@ -7929,12 +7501,12 @@
                 <a:ea typeface="Arial" pitchFamily="34" charset="-122"/>
                 <a:cs typeface="Arial" pitchFamily="34" charset="-120"/>
               </a:rPr>
-              <a:t>二级无隐患自动过</a:t>
+              <a:t>二级无异常自动过</a:t>
             </a:r>
             <a:endParaRPr lang="en-US" sz="1200" dirty="0"/>
           </a:p>
           <a:p>
-            <a:pPr marL="0" indent="0">
+            <a:pPr indent="0" marL="0">
               <a:buNone/>
             </a:pPr>
             <a:r>
@@ -7971,7 +7543,6 @@
         <a:solidFill>
           <a:srgbClr val="F5F5F7"/>
         </a:solidFill>
-        <a:effectLst/>
       </p:bgPr>
     </p:bg>
     <p:spTree>
@@ -8009,7 +7580,7 @@
           <a:bodyPr wrap="square" lIns="0" tIns="0" rIns="0" bIns="0" rtlCol="0" anchor="ctr"/>
           <a:lstStyle/>
           <a:p>
-            <a:pPr marL="0" indent="0">
+            <a:pPr indent="0" marL="0">
               <a:buNone/>
             </a:pPr>
             <a:r>
@@ -8053,20 +7624,13 @@
             <a:prstDash val="solid"/>
           </a:ln>
           <a:effectLst>
-            <a:outerShdw blurRad="228600" dist="50800" dir="8100000" algn="bl" rotWithShape="0">
+            <a:outerShdw sx="100000" sy="100000" kx="0" ky="0" algn="bl" rotWithShape="0" blurRad="228600" dist="50800" dir="8100000">
               <a:srgbClr val="000000">
                 <a:alpha val="6000"/>
               </a:srgbClr>
             </a:outerShdw>
           </a:effectLst>
         </p:spPr>
-        <p:txBody>
-          <a:bodyPr/>
-          <a:lstStyle/>
-          <a:p>
-            <a:endParaRPr lang="zh-CN" altLang="en-US"/>
-          </a:p>
-        </p:txBody>
       </p:sp>
       <p:sp>
         <p:nvSpPr>
@@ -8092,13 +7656,6 @@
             <a:prstDash val="solid"/>
           </a:ln>
         </p:spPr>
-        <p:txBody>
-          <a:bodyPr/>
-          <a:lstStyle/>
-          <a:p>
-            <a:endParaRPr lang="zh-CN" altLang="en-US"/>
-          </a:p>
-        </p:txBody>
       </p:sp>
       <p:sp>
         <p:nvSpPr>
@@ -8121,7 +7678,7 @@
           <a:bodyPr wrap="square" lIns="0" tIns="0" rIns="0" bIns="0" rtlCol="0" anchor="ctr"/>
           <a:lstStyle/>
           <a:p>
-            <a:pPr marL="0" indent="0">
+            <a:pPr indent="0" marL="0">
               <a:buNone/>
             </a:pPr>
             <a:r>
@@ -8160,7 +7717,7 @@
           <a:bodyPr wrap="square" lIns="0" tIns="0" rIns="0" bIns="0" rtlCol="0" anchor="ctr"/>
           <a:lstStyle/>
           <a:p>
-            <a:pPr marL="0" indent="0">
+            <a:pPr indent="0" marL="0">
               <a:buNone/>
             </a:pPr>
             <a:r>
@@ -8204,20 +7761,13 @@
             <a:prstDash val="solid"/>
           </a:ln>
           <a:effectLst>
-            <a:outerShdw blurRad="228600" dist="50800" dir="8100000" algn="bl" rotWithShape="0">
+            <a:outerShdw sx="100000" sy="100000" kx="0" ky="0" algn="bl" rotWithShape="0" blurRad="228600" dist="50800" dir="8100000">
               <a:srgbClr val="000000">
                 <a:alpha val="6000"/>
               </a:srgbClr>
             </a:outerShdw>
           </a:effectLst>
         </p:spPr>
-        <p:txBody>
-          <a:bodyPr/>
-          <a:lstStyle/>
-          <a:p>
-            <a:endParaRPr lang="zh-CN" altLang="en-US"/>
-          </a:p>
-        </p:txBody>
       </p:sp>
       <p:sp>
         <p:nvSpPr>
@@ -8243,13 +7793,6 @@
             <a:prstDash val="solid"/>
           </a:ln>
         </p:spPr>
-        <p:txBody>
-          <a:bodyPr/>
-          <a:lstStyle/>
-          <a:p>
-            <a:endParaRPr lang="zh-CN" altLang="en-US"/>
-          </a:p>
-        </p:txBody>
       </p:sp>
       <p:sp>
         <p:nvSpPr>
@@ -8272,7 +7815,7 @@
           <a:bodyPr wrap="square" lIns="0" tIns="0" rIns="0" bIns="0" rtlCol="0" anchor="ctr"/>
           <a:lstStyle/>
           <a:p>
-            <a:pPr marL="0" indent="0">
+            <a:pPr indent="0" marL="0">
               <a:buNone/>
             </a:pPr>
             <a:r>
@@ -8311,7 +7854,7 @@
           <a:bodyPr wrap="square" lIns="0" tIns="0" rIns="0" bIns="0" rtlCol="0" anchor="ctr"/>
           <a:lstStyle/>
           <a:p>
-            <a:pPr marL="0" indent="0">
+            <a:pPr indent="0" marL="0">
               <a:buNone/>
             </a:pPr>
             <a:r>
@@ -8355,20 +7898,13 @@
             <a:prstDash val="solid"/>
           </a:ln>
           <a:effectLst>
-            <a:outerShdw blurRad="228600" dist="50800" dir="8100000" algn="bl" rotWithShape="0">
+            <a:outerShdw sx="100000" sy="100000" kx="0" ky="0" algn="bl" rotWithShape="0" blurRad="228600" dist="50800" dir="8100000">
               <a:srgbClr val="000000">
                 <a:alpha val="6000"/>
               </a:srgbClr>
             </a:outerShdw>
           </a:effectLst>
         </p:spPr>
-        <p:txBody>
-          <a:bodyPr/>
-          <a:lstStyle/>
-          <a:p>
-            <a:endParaRPr lang="zh-CN" altLang="en-US"/>
-          </a:p>
-        </p:txBody>
       </p:sp>
       <p:sp>
         <p:nvSpPr>
@@ -8394,13 +7930,6 @@
             <a:prstDash val="solid"/>
           </a:ln>
         </p:spPr>
-        <p:txBody>
-          <a:bodyPr/>
-          <a:lstStyle/>
-          <a:p>
-            <a:endParaRPr lang="zh-CN" altLang="en-US"/>
-          </a:p>
-        </p:txBody>
       </p:sp>
       <p:sp>
         <p:nvSpPr>
@@ -8423,7 +7952,7 @@
           <a:bodyPr wrap="square" lIns="0" tIns="0" rIns="0" bIns="0" rtlCol="0" anchor="ctr"/>
           <a:lstStyle/>
           <a:p>
-            <a:pPr marL="0" indent="0">
+            <a:pPr indent="0" marL="0">
               <a:buNone/>
             </a:pPr>
             <a:r>
@@ -8462,7 +7991,7 @@
           <a:bodyPr wrap="square" lIns="0" tIns="0" rIns="0" bIns="0" rtlCol="0" anchor="ctr"/>
           <a:lstStyle/>
           <a:p>
-            <a:pPr marL="0" indent="0">
+            <a:pPr indent="0" marL="0">
               <a:buNone/>
             </a:pPr>
             <a:r>
@@ -8506,20 +8035,13 @@
             <a:prstDash val="solid"/>
           </a:ln>
           <a:effectLst>
-            <a:outerShdw blurRad="228600" dist="50800" dir="8100000" algn="bl" rotWithShape="0">
+            <a:outerShdw sx="100000" sy="100000" kx="0" ky="0" algn="bl" rotWithShape="0" blurRad="228600" dist="50800" dir="8100000">
               <a:srgbClr val="000000">
                 <a:alpha val="6000"/>
               </a:srgbClr>
             </a:outerShdw>
           </a:effectLst>
         </p:spPr>
-        <p:txBody>
-          <a:bodyPr/>
-          <a:lstStyle/>
-          <a:p>
-            <a:endParaRPr lang="zh-CN" altLang="en-US"/>
-          </a:p>
-        </p:txBody>
       </p:sp>
       <p:sp>
         <p:nvSpPr>
@@ -8545,13 +8067,6 @@
             <a:prstDash val="solid"/>
           </a:ln>
         </p:spPr>
-        <p:txBody>
-          <a:bodyPr/>
-          <a:lstStyle/>
-          <a:p>
-            <a:endParaRPr lang="zh-CN" altLang="en-US"/>
-          </a:p>
-        </p:txBody>
       </p:sp>
       <p:sp>
         <p:nvSpPr>
@@ -8574,7 +8089,7 @@
           <a:bodyPr wrap="square" lIns="0" tIns="0" rIns="0" bIns="0" rtlCol="0" anchor="ctr"/>
           <a:lstStyle/>
           <a:p>
-            <a:pPr marL="0" indent="0">
+            <a:pPr indent="0" marL="0">
               <a:buNone/>
             </a:pPr>
             <a:r>
@@ -8586,7 +8101,7 @@
                 <a:ea typeface="Arial" pitchFamily="34" charset="-122"/>
                 <a:cs typeface="Arial" pitchFamily="34" charset="-120"/>
               </a:rPr>
-              <a:t>隐患处置</a:t>
+              <a:t>问题处置</a:t>
             </a:r>
             <a:endParaRPr lang="en-US" sz="1500" dirty="0"/>
           </a:p>
@@ -8613,7 +8128,7 @@
           <a:bodyPr wrap="square" lIns="0" tIns="0" rIns="0" bIns="0" rtlCol="0" anchor="ctr"/>
           <a:lstStyle/>
           <a:p>
-            <a:pPr marL="0" indent="0">
+            <a:pPr indent="0" marL="0">
               <a:buNone/>
             </a:pPr>
             <a:r>
@@ -8625,7 +8140,7 @@
                 <a:ea typeface="Arial" pitchFamily="34" charset="-122"/>
                 <a:cs typeface="Arial" pitchFamily="34" charset="-120"/>
               </a:rPr>
-              <a:t>× 与空白记隐患，推送钉钉介入</a:t>
+              <a:t>× 与空白记异常，推送钉钉介入</a:t>
             </a:r>
             <a:endParaRPr lang="en-US" sz="1400" dirty="0"/>
           </a:p>
@@ -8657,20 +8172,13 @@
             <a:prstDash val="solid"/>
           </a:ln>
           <a:effectLst>
-            <a:outerShdw blurRad="228600" dist="50800" dir="8100000" algn="bl" rotWithShape="0">
+            <a:outerShdw sx="100000" sy="100000" kx="0" ky="0" algn="bl" rotWithShape="0" blurRad="228600" dist="50800" dir="8100000">
               <a:srgbClr val="000000">
                 <a:alpha val="6000"/>
               </a:srgbClr>
             </a:outerShdw>
           </a:effectLst>
         </p:spPr>
-        <p:txBody>
-          <a:bodyPr/>
-          <a:lstStyle/>
-          <a:p>
-            <a:endParaRPr lang="zh-CN" altLang="en-US"/>
-          </a:p>
-        </p:txBody>
       </p:sp>
       <p:sp>
         <p:nvSpPr>
@@ -8696,13 +8204,6 @@
             <a:prstDash val="solid"/>
           </a:ln>
         </p:spPr>
-        <p:txBody>
-          <a:bodyPr/>
-          <a:lstStyle/>
-          <a:p>
-            <a:endParaRPr lang="zh-CN" altLang="en-US"/>
-          </a:p>
-        </p:txBody>
       </p:sp>
       <p:sp>
         <p:nvSpPr>
@@ -8725,7 +8226,7 @@
           <a:bodyPr wrap="square" lIns="0" tIns="0" rIns="0" bIns="0" rtlCol="0" anchor="ctr"/>
           <a:lstStyle/>
           <a:p>
-            <a:pPr marL="0" indent="0">
+            <a:pPr indent="0" marL="0">
               <a:buNone/>
             </a:pPr>
             <a:r>
@@ -8764,7 +8265,7 @@
           <a:bodyPr wrap="square" lIns="0" tIns="0" rIns="0" bIns="0" rtlCol="0" anchor="ctr"/>
           <a:lstStyle/>
           <a:p>
-            <a:pPr marL="0" indent="0">
+            <a:pPr indent="0" marL="0">
               <a:buNone/>
             </a:pPr>
             <a:r>
@@ -9086,319 +8587,4 @@
     </a:ext>
   </a:extLst>
 </a:theme>
-</file>
-
-<file path=ppt/theme/theme2.xml><?xml version="1.0" encoding="utf-8"?>
-<a:theme xmlns:a="http://schemas.openxmlformats.org/drawingml/2006/main" name="Office 主题​​">
-  <a:themeElements>
-    <a:clrScheme name="Office">
-      <a:dk1>
-        <a:sysClr val="windowText" lastClr="000000"/>
-      </a:dk1>
-      <a:lt1>
-        <a:sysClr val="window" lastClr="FFFFFF"/>
-      </a:lt1>
-      <a:dk2>
-        <a:srgbClr val="0E2841"/>
-      </a:dk2>
-      <a:lt2>
-        <a:srgbClr val="E8E8E8"/>
-      </a:lt2>
-      <a:accent1>
-        <a:srgbClr val="156082"/>
-      </a:accent1>
-      <a:accent2>
-        <a:srgbClr val="E97132"/>
-      </a:accent2>
-      <a:accent3>
-        <a:srgbClr val="196B24"/>
-      </a:accent3>
-      <a:accent4>
-        <a:srgbClr val="0F9ED5"/>
-      </a:accent4>
-      <a:accent5>
-        <a:srgbClr val="A02B93"/>
-      </a:accent5>
-      <a:accent6>
-        <a:srgbClr val="4EA72E"/>
-      </a:accent6>
-      <a:hlink>
-        <a:srgbClr val="467886"/>
-      </a:hlink>
-      <a:folHlink>
-        <a:srgbClr val="96607D"/>
-      </a:folHlink>
-    </a:clrScheme>
-    <a:fontScheme name="Office">
-      <a:majorFont>
-        <a:latin typeface="等线 Light" panose="02110004020202020204"/>
-        <a:ea typeface=""/>
-        <a:cs typeface=""/>
-        <a:font script="Jpan" typeface="游ゴシック Light"/>
-        <a:font script="Hang" typeface="맑은 고딕"/>
-        <a:font script="Hans" typeface="等线 Light"/>
-        <a:font script="Hant" typeface="新細明體"/>
-        <a:font script="Arab" typeface="Times New Roman"/>
-        <a:font script="Hebr" typeface="Times New Roman"/>
-        <a:font script="Thai" typeface="Angsana New"/>
-        <a:font script="Ethi" typeface="Nyala"/>
-        <a:font script="Beng" typeface="Vrinda"/>
-        <a:font script="Gujr" typeface="Shruti"/>
-        <a:font script="Khmr" typeface="MoolBoran"/>
-        <a:font script="Knda" typeface="Tunga"/>
-        <a:font script="Guru" typeface="Raavi"/>
-        <a:font script="Cans" typeface="Euphemia"/>
-        <a:font script="Cher" typeface="Plantagenet Cherokee"/>
-        <a:font script="Yiii" typeface="Microsoft Yi Baiti"/>
-        <a:font script="Tibt" typeface="Microsoft Himalaya"/>
-        <a:font script="Thaa" typeface="MV Boli"/>
-        <a:font script="Deva" typeface="Mangal"/>
-        <a:font script="Telu" typeface="Gautami"/>
-        <a:font script="Taml" typeface="Latha"/>
-        <a:font script="Syrc" typeface="Estrangelo Edessa"/>
-        <a:font script="Orya" typeface="Kalinga"/>
-        <a:font script="Mlym" typeface="Kartika"/>
-        <a:font script="Laoo" typeface="DokChampa"/>
-        <a:font script="Sinh" typeface="Iskoola Pota"/>
-        <a:font script="Mong" typeface="Mongolian Baiti"/>
-        <a:font script="Viet" typeface="Times New Roman"/>
-        <a:font script="Uigh" typeface="Microsoft Uighur"/>
-        <a:font script="Geor" typeface="Sylfaen"/>
-        <a:font script="Armn" typeface="Arial"/>
-        <a:font script="Bugi" typeface="Leelawadee UI"/>
-        <a:font script="Bopo" typeface="Microsoft JhengHei"/>
-        <a:font script="Java" typeface="Javanese Text"/>
-        <a:font script="Lisu" typeface="Segoe UI"/>
-        <a:font script="Mymr" typeface="Myanmar Text"/>
-        <a:font script="Nkoo" typeface="Ebrima"/>
-        <a:font script="Olck" typeface="Nirmala UI"/>
-        <a:font script="Osma" typeface="Ebrima"/>
-        <a:font script="Phag" typeface="Phagspa"/>
-        <a:font script="Syrn" typeface="Estrangelo Edessa"/>
-        <a:font script="Syrj" typeface="Estrangelo Edessa"/>
-        <a:font script="Syre" typeface="Estrangelo Edessa"/>
-        <a:font script="Sora" typeface="Nirmala UI"/>
-        <a:font script="Tale" typeface="Microsoft Tai Le"/>
-        <a:font script="Talu" typeface="Microsoft New Tai Lue"/>
-        <a:font script="Tfng" typeface="Ebrima"/>
-      </a:majorFont>
-      <a:minorFont>
-        <a:latin typeface="等线" panose="02110004020202020204"/>
-        <a:ea typeface=""/>
-        <a:cs typeface=""/>
-        <a:font script="Jpan" typeface="游ゴシック"/>
-        <a:font script="Hang" typeface="맑은 고딕"/>
-        <a:font script="Hans" typeface="等线"/>
-        <a:font script="Hant" typeface="新細明體"/>
-        <a:font script="Arab" typeface="Arial"/>
-        <a:font script="Hebr" typeface="Arial"/>
-        <a:font script="Thai" typeface="Cordia New"/>
-        <a:font script="Ethi" typeface="Nyala"/>
-        <a:font script="Beng" typeface="Vrinda"/>
-        <a:font script="Gujr" typeface="Shruti"/>
-        <a:font script="Khmr" typeface="DaunPenh"/>
-        <a:font script="Knda" typeface="Tunga"/>
-        <a:font script="Guru" typeface="Raavi"/>
-        <a:font script="Cans" typeface="Euphemia"/>
-        <a:font script="Cher" typeface="Plantagenet Cherokee"/>
-        <a:font script="Yiii" typeface="Microsoft Yi Baiti"/>
-        <a:font script="Tibt" typeface="Microsoft Himalaya"/>
-        <a:font script="Thaa" typeface="MV Boli"/>
-        <a:font script="Deva" typeface="Mangal"/>
-        <a:font script="Telu" typeface="Gautami"/>
-        <a:font script="Taml" typeface="Latha"/>
-        <a:font script="Syrc" typeface="Estrangelo Edessa"/>
-        <a:font script="Orya" typeface="Kalinga"/>
-        <a:font script="Mlym" typeface="Kartika"/>
-        <a:font script="Laoo" typeface="DokChampa"/>
-        <a:font script="Sinh" typeface="Iskoola Pota"/>
-        <a:font script="Mong" typeface="Mongolian Baiti"/>
-        <a:font script="Viet" typeface="Arial"/>
-        <a:font script="Uigh" typeface="Microsoft Uighur"/>
-        <a:font script="Geor" typeface="Sylfaen"/>
-        <a:font script="Armn" typeface="Arial"/>
-        <a:font script="Bugi" typeface="Leelawadee UI"/>
-        <a:font script="Bopo" typeface="Microsoft JhengHei"/>
-        <a:font script="Java" typeface="Javanese Text"/>
-        <a:font script="Lisu" typeface="Segoe UI"/>
-        <a:font script="Mymr" typeface="Myanmar Text"/>
-        <a:font script="Nkoo" typeface="Ebrima"/>
-        <a:font script="Olck" typeface="Nirmala UI"/>
-        <a:font script="Osma" typeface="Ebrima"/>
-        <a:font script="Phag" typeface="Phagspa"/>
-        <a:font script="Syrn" typeface="Estrangelo Edessa"/>
-        <a:font script="Syrj" typeface="Estrangelo Edessa"/>
-        <a:font script="Syre" typeface="Estrangelo Edessa"/>
-        <a:font script="Sora" typeface="Nirmala UI"/>
-        <a:font script="Tale" typeface="Microsoft Tai Le"/>
-        <a:font script="Talu" typeface="Microsoft New Tai Lue"/>
-        <a:font script="Tfng" typeface="Ebrima"/>
-      </a:minorFont>
-    </a:fontScheme>
-    <a:fmtScheme name="Office">
-      <a:fillStyleLst>
-        <a:solidFill>
-          <a:schemeClr val="phClr"/>
-        </a:solidFill>
-        <a:gradFill rotWithShape="1">
-          <a:gsLst>
-            <a:gs pos="0">
-              <a:schemeClr val="phClr">
-                <a:lumMod val="110000"/>
-                <a:satMod val="105000"/>
-                <a:tint val="67000"/>
-              </a:schemeClr>
-            </a:gs>
-            <a:gs pos="50000">
-              <a:schemeClr val="phClr">
-                <a:lumMod val="105000"/>
-                <a:satMod val="103000"/>
-                <a:tint val="73000"/>
-              </a:schemeClr>
-            </a:gs>
-            <a:gs pos="100000">
-              <a:schemeClr val="phClr">
-                <a:lumMod val="105000"/>
-                <a:satMod val="109000"/>
-                <a:tint val="81000"/>
-              </a:schemeClr>
-            </a:gs>
-          </a:gsLst>
-          <a:lin ang="5400000" scaled="0"/>
-        </a:gradFill>
-        <a:gradFill rotWithShape="1">
-          <a:gsLst>
-            <a:gs pos="0">
-              <a:schemeClr val="phClr">
-                <a:satMod val="103000"/>
-                <a:lumMod val="102000"/>
-                <a:tint val="94000"/>
-              </a:schemeClr>
-            </a:gs>
-            <a:gs pos="50000">
-              <a:schemeClr val="phClr">
-                <a:satMod val="110000"/>
-                <a:lumMod val="100000"/>
-                <a:shade val="100000"/>
-              </a:schemeClr>
-            </a:gs>
-            <a:gs pos="100000">
-              <a:schemeClr val="phClr">
-                <a:lumMod val="99000"/>
-                <a:satMod val="120000"/>
-                <a:shade val="78000"/>
-              </a:schemeClr>
-            </a:gs>
-          </a:gsLst>
-          <a:lin ang="5400000" scaled="0"/>
-        </a:gradFill>
-      </a:fillStyleLst>
-      <a:lnStyleLst>
-        <a:ln w="12700" cap="flat" cmpd="sng" algn="ctr">
-          <a:solidFill>
-            <a:schemeClr val="phClr"/>
-          </a:solidFill>
-          <a:prstDash val="solid"/>
-          <a:miter lim="800000"/>
-        </a:ln>
-        <a:ln w="19050" cap="flat" cmpd="sng" algn="ctr">
-          <a:solidFill>
-            <a:schemeClr val="phClr"/>
-          </a:solidFill>
-          <a:prstDash val="solid"/>
-          <a:miter lim="800000"/>
-        </a:ln>
-        <a:ln w="25400" cap="flat" cmpd="sng" algn="ctr">
-          <a:solidFill>
-            <a:schemeClr val="phClr"/>
-          </a:solidFill>
-          <a:prstDash val="solid"/>
-          <a:miter lim="800000"/>
-        </a:ln>
-      </a:lnStyleLst>
-      <a:effectStyleLst>
-        <a:effectStyle>
-          <a:effectLst/>
-        </a:effectStyle>
-        <a:effectStyle>
-          <a:effectLst/>
-        </a:effectStyle>
-        <a:effectStyle>
-          <a:effectLst>
-            <a:outerShdw blurRad="57150" dist="19050" dir="5400000" algn="ctr" rotWithShape="0">
-              <a:srgbClr val="000000">
-                <a:alpha val="63000"/>
-              </a:srgbClr>
-            </a:outerShdw>
-          </a:effectLst>
-        </a:effectStyle>
-      </a:effectStyleLst>
-      <a:bgFillStyleLst>
-        <a:solidFill>
-          <a:schemeClr val="phClr"/>
-        </a:solidFill>
-        <a:solidFill>
-          <a:schemeClr val="phClr">
-            <a:tint val="95000"/>
-            <a:satMod val="170000"/>
-          </a:schemeClr>
-        </a:solidFill>
-        <a:gradFill rotWithShape="1">
-          <a:gsLst>
-            <a:gs pos="0">
-              <a:schemeClr val="phClr">
-                <a:tint val="93000"/>
-                <a:satMod val="150000"/>
-                <a:shade val="98000"/>
-                <a:lumMod val="102000"/>
-              </a:schemeClr>
-            </a:gs>
-            <a:gs pos="50000">
-              <a:schemeClr val="phClr">
-                <a:tint val="98000"/>
-                <a:satMod val="130000"/>
-                <a:shade val="90000"/>
-                <a:lumMod val="103000"/>
-              </a:schemeClr>
-            </a:gs>
-            <a:gs pos="100000">
-              <a:schemeClr val="phClr">
-                <a:shade val="63000"/>
-                <a:satMod val="120000"/>
-              </a:schemeClr>
-            </a:gs>
-          </a:gsLst>
-          <a:lin ang="5400000" scaled="0"/>
-        </a:gradFill>
-      </a:bgFillStyleLst>
-    </a:fmtScheme>
-  </a:themeElements>
-  <a:objectDefaults>
-    <a:lnDef>
-      <a:spPr/>
-      <a:bodyPr/>
-      <a:lstStyle/>
-      <a:style>
-        <a:lnRef idx="2">
-          <a:schemeClr val="accent1"/>
-        </a:lnRef>
-        <a:fillRef idx="0">
-          <a:schemeClr val="accent1"/>
-        </a:fillRef>
-        <a:effectRef idx="1">
-          <a:schemeClr val="accent1"/>
-        </a:effectRef>
-        <a:fontRef idx="minor">
-          <a:schemeClr val="tx1"/>
-        </a:fontRef>
-      </a:style>
-    </a:lnDef>
-  </a:objectDefaults>
-  <a:extraClrSchemeLst/>
-  <a:extLst>
-    <a:ext uri="{05A4C25C-085E-4340-85A3-A5531E510DB2}">
-      <thm15:themeFamily xmlns:thm15="http://schemas.microsoft.com/office/thememl/2012/main" name="Office Theme" id="{2E142A2C-CD16-42D6-873A-C26D2A0506FA}" vid="{1BDDFF52-6CD6-40A5-AB3C-68EB2F1E4D0A}"/>
-    </a:ext>
-  </a:extLst>
-</a:theme>
 </file>